--- a/CCP_FIRST_REVIEW[1][1].pptx
+++ b/CCP_FIRST_REVIEW[1][1].pptx
@@ -6,12 +6,17 @@
   </p:sldMasterIdLst>
   <p:sldIdLst>
     <p:sldId id="256" r:id="rId3"/>
-    <p:sldId id="273" r:id="rId4"/>
-    <p:sldId id="274" r:id="rId5"/>
-    <p:sldId id="267" r:id="rId6"/>
-    <p:sldId id="275" r:id="rId7"/>
-    <p:sldId id="276" r:id="rId8"/>
-    <p:sldId id="262" r:id="rId9"/>
+    <p:sldId id="277" r:id="rId4"/>
+    <p:sldId id="278" r:id="rId5"/>
+    <p:sldId id="273" r:id="rId6"/>
+    <p:sldId id="279" r:id="rId7"/>
+    <p:sldId id="267" r:id="rId8"/>
+    <p:sldId id="280" r:id="rId9"/>
+    <p:sldId id="275" r:id="rId10"/>
+    <p:sldId id="276" r:id="rId11"/>
+    <p:sldId id="281" r:id="rId12"/>
+    <p:sldId id="282" r:id="rId13"/>
+    <p:sldId id="262" r:id="rId14"/>
   </p:sldIdLst>
   <p:sldSz cx="12192000" cy="6858000"/>
   <p:notesSz cx="6858000" cy="9144000"/>
@@ -3489,7 +3494,7 @@
 </p:sld>
 </file>
 
-<file path=ppt/slides/slide2.xml><?xml version="1.0" encoding="utf-8"?>
+<file path=ppt/slides/slide10.xml><?xml version="1.0" encoding="utf-8"?>
 <p:sld xmlns:a="http://schemas.openxmlformats.org/drawingml/2006/main" xmlns:r="http://schemas.openxmlformats.org/officeDocument/2006/relationships" xmlns:p="http://schemas.openxmlformats.org/presentationml/2006/main">
   <p:cSld>
     <p:spTree>
@@ -3498,14 +3503,7 @@
         <p:cNvGrpSpPr/>
         <p:nvPr/>
       </p:nvGrpSpPr>
-      <p:grpSpPr>
-        <a:xfrm>
-          <a:off x="0" y="0"/>
-          <a:ext cx="0" cy="0"/>
-          <a:chOff x="0" y="0"/>
-          <a:chExt cx="0" cy="0"/>
-        </a:xfrm>
-      </p:grpSpPr>
+      <p:grpSpPr/>
       <p:sp>
         <p:nvSpPr>
           <p:cNvPr id="2" name="Title 1"/>
@@ -3516,21 +3514,15 @@
             <p:ph type="title"/>
           </p:nvPr>
         </p:nvSpPr>
-        <p:spPr>
-          <a:xfrm>
-            <a:off x="838200" y="365125"/>
-            <a:ext cx="8950036" cy="1325563"/>
-          </a:xfrm>
-        </p:spPr>
-        <p:txBody>
-          <a:bodyPr/>
-          <a:lstStyle/>
-          <a:p>
-            <a:r>
-              <a:rPr lang="en-IN" dirty="0"/>
-              <a:t>PROJECT OBJECTIVES</a:t>
-            </a:r>
-            <a:endParaRPr lang="en-IN" dirty="0"/>
+        <p:spPr/>
+        <p:txBody>
+          <a:bodyPr/>
+          <a:p>
+            <a:r>
+              <a:rPr lang="en-GB" altLang="en-US"/>
+              <a:t>CONCLUSION</a:t>
+            </a:r>
+            <a:endParaRPr lang="en-GB" altLang="en-US"/>
           </a:p>
         </p:txBody>
       </p:sp>
@@ -3546,72 +3538,51 @@
         </p:nvSpPr>
         <p:spPr/>
         <p:txBody>
-          <a:bodyPr>
-            <a:noAutofit/>
-          </a:bodyPr>
-          <a:lstStyle/>
-          <a:p>
-            <a:r>
-              <a:rPr lang="en-US" sz="2000" dirty="0"/>
-              <a:t>The primary objective of this project is to design and develop a web-based system for assessing students’ mental health conditions using Machine Learning and Artificial Intelligence techniques.</a:t>
-            </a:r>
-            <a:endParaRPr lang="en-US" sz="2000" dirty="0"/>
-          </a:p>
-          <a:p>
-            <a:r>
-              <a:rPr lang="en-US" sz="2000" dirty="0"/>
-              <a:t>The system aims to collect self-assessment data securely and analyze it using a Logistic Regression model to accurately identify stress, anxiety, and depression levels. </a:t>
-            </a:r>
-            <a:endParaRPr lang="en-US" sz="2000" dirty="0"/>
-          </a:p>
-          <a:p>
-            <a:r>
-              <a:rPr lang="en-US" sz="2000" dirty="0"/>
-              <a:t>Another objective is to integrate an AI chatbot based on Natural Language Processing to enable interactive communication and provide basic guidance to students.</a:t>
-            </a:r>
-            <a:endParaRPr lang="en-US" sz="2000" dirty="0"/>
-          </a:p>
-          <a:p>
-            <a:r>
-              <a:rPr lang="en-US" sz="2000" dirty="0"/>
-              <a:t>The project also focuses on ensuring user privacy and anonymity to encourage honest participation.</a:t>
-            </a:r>
-            <a:endParaRPr lang="en-US" sz="2000" dirty="0"/>
-          </a:p>
-          <a:p>
-            <a:r>
-              <a:rPr lang="en-US" sz="2000" dirty="0"/>
-              <a:t>Additionally, the system seeks to support early detection of mental health issues, reduce the manual workload of counselors through automated screening, and provide a scalable solution that can be enhanced with advanced models and features in the future.</a:t>
-            </a:r>
-            <a:endParaRPr lang="en-US" sz="2000" dirty="0"/>
-          </a:p>
-        </p:txBody>
-      </p:sp>
-      <p:pic>
-        <p:nvPicPr>
-          <p:cNvPr id="4" name="Picture 3"/>
-          <p:cNvPicPr>
-            <a:picLocks noChangeAspect="1"/>
-          </p:cNvPicPr>
-          <p:nvPr/>
-        </p:nvPicPr>
-        <p:blipFill rotWithShape="1">
-          <a:blip r:embed="rId1"/>
-          <a:srcRect r="5721" b="8394"/>
-          <a:stretch>
-            <a:fillRect/>
-          </a:stretch>
-        </p:blipFill>
-        <p:spPr>
-          <a:xfrm>
-            <a:off x="10471514" y="365124"/>
-            <a:ext cx="1433006" cy="1325563"/>
-          </a:xfrm>
-          <a:prstGeom prst="rect">
-            <a:avLst/>
-          </a:prstGeom>
-        </p:spPr>
-      </p:pic>
+          <a:bodyPr/>
+          <a:p>
+            <a:r>
+              <a:rPr lang="en-US" altLang="en-GB" sz="2000"/>
+              <a:t>The AI-based mental health support system helps users monitor their mental well-being through questionnaires, machine learning prediction, and chatbot interaction.</a:t>
+            </a:r>
+            <a:endParaRPr lang="en-US" altLang="en-GB" sz="2000"/>
+          </a:p>
+          <a:p>
+            <a:r>
+              <a:rPr lang="en-US" altLang="en-GB" sz="2000"/>
+              <a:t> The system analyzes user responses and predicts mental health risk levels such as low, moderate, or high. </a:t>
+            </a:r>
+            <a:endParaRPr lang="en-US" altLang="en-GB" sz="2000"/>
+          </a:p>
+          <a:p>
+            <a:r>
+              <a:rPr lang="en-US" altLang="en-GB" sz="2000"/>
+              <a:t>The chatbot provides supportive responses and basic coping suggestions based on user messages.</a:t>
+            </a:r>
+            <a:endParaRPr lang="en-US" altLang="en-GB" sz="2000"/>
+          </a:p>
+          <a:p>
+            <a:r>
+              <a:rPr lang="en-US" altLang="en-GB" sz="2000"/>
+              <a:t>In addition, the platform includes relaxation exercises and simple games that help reduce stress and improve user engagement. </a:t>
+            </a:r>
+            <a:endParaRPr lang="en-US" altLang="en-GB" sz="2000"/>
+          </a:p>
+          <a:p>
+            <a:r>
+              <a:rPr lang="en-US" altLang="en-GB" sz="2000"/>
+              <a:t>The system also stores user data securely and displays results through a dashboard for easy understanding.</a:t>
+            </a:r>
+            <a:endParaRPr lang="en-US" altLang="en-GB" sz="2000"/>
+          </a:p>
+          <a:p>
+            <a:r>
+              <a:rPr lang="en-US" altLang="en-GB" sz="2000"/>
+              <a:t> Overall, the project demonstrates how artificial intelligence, machine learning, and web technologies can be integrated to create an accessible and effective mental health support platform for users.</a:t>
+            </a:r>
+            <a:endParaRPr lang="en-US" altLang="en-GB" sz="2000"/>
+          </a:p>
+        </p:txBody>
+      </p:sp>
     </p:spTree>
   </p:cSld>
   <p:clrMapOvr>
@@ -3620,7 +3591,7 @@
 </p:sld>
 </file>
 
-<file path=ppt/slides/slide3.xml><?xml version="1.0" encoding="utf-8"?>
+<file path=ppt/slides/slide11.xml><?xml version="1.0" encoding="utf-8"?>
 <p:sld xmlns:a="http://schemas.openxmlformats.org/drawingml/2006/main" xmlns:r="http://schemas.openxmlformats.org/officeDocument/2006/relationships" xmlns:p="http://schemas.openxmlformats.org/presentationml/2006/main">
   <p:cSld>
     <p:spTree>
@@ -3629,14 +3600,7 @@
         <p:cNvGrpSpPr/>
         <p:nvPr/>
       </p:nvGrpSpPr>
-      <p:grpSpPr>
-        <a:xfrm>
-          <a:off x="0" y="0"/>
-          <a:ext cx="0" cy="0"/>
-          <a:chOff x="0" y="0"/>
-          <a:chExt cx="0" cy="0"/>
-        </a:xfrm>
-      </p:grpSpPr>
+      <p:grpSpPr/>
       <p:sp>
         <p:nvSpPr>
           <p:cNvPr id="2" name="Title 1"/>
@@ -3647,21 +3611,15 @@
             <p:ph type="title"/>
           </p:nvPr>
         </p:nvSpPr>
-        <p:spPr>
-          <a:xfrm>
-            <a:off x="838200" y="365125"/>
-            <a:ext cx="8950036" cy="1325563"/>
-          </a:xfrm>
-        </p:spPr>
-        <p:txBody>
-          <a:bodyPr/>
-          <a:lstStyle/>
-          <a:p>
-            <a:r>
-              <a:rPr lang="en-IN" dirty="0"/>
-              <a:t>ABSTRACT</a:t>
-            </a:r>
-            <a:endParaRPr lang="en-IN" dirty="0"/>
+        <p:spPr/>
+        <p:txBody>
+          <a:bodyPr/>
+          <a:p>
+            <a:r>
+              <a:rPr lang="en-GB" altLang="en-US"/>
+              <a:t>FUTURE SCOPE</a:t>
+            </a:r>
+            <a:endParaRPr lang="en-GB" altLang="en-US"/>
           </a:p>
         </p:txBody>
       </p:sp>
@@ -3678,108 +3636,45 @@
         <p:spPr/>
         <p:txBody>
           <a:bodyPr>
-            <a:noAutofit/>
+            <a:normAutofit/>
           </a:bodyPr>
-          <a:lstStyle/>
-          <a:p>
-            <a:r>
-              <a:rPr lang="en-US" sz="1800" dirty="0"/>
-              <a:t>Mental health issues such as stress, anxiety, and depression are increasing among students.</a:t>
-            </a:r>
-            <a:endParaRPr lang="en-US" sz="1800" dirty="0"/>
-          </a:p>
-          <a:p>
-            <a:r>
-              <a:rPr lang="en-US" sz="1800" dirty="0"/>
-              <a:t>Traditional mental health assessment methods are time-consuming and not easily accessible.</a:t>
-            </a:r>
-            <a:endParaRPr lang="en-US" sz="1800" dirty="0"/>
-          </a:p>
-          <a:p>
-            <a:r>
-              <a:rPr lang="en-US" sz="1800" dirty="0"/>
-              <a:t>This project proposes a web-based student mental health assessment system using Machine Learning and Artificial Intelligence.</a:t>
-            </a:r>
-            <a:endParaRPr lang="en-US" sz="1800" dirty="0"/>
-          </a:p>
-          <a:p>
-            <a:r>
-              <a:rPr lang="en-US" sz="1800" dirty="0"/>
-              <a:t>Python-based Machine Learning models (Logistic Regression) are used to analyze self-assessment data and predict mental health conditions.</a:t>
-            </a:r>
-            <a:endParaRPr lang="en-US" sz="1800" dirty="0"/>
-          </a:p>
-          <a:p>
-            <a:r>
-              <a:rPr lang="en-US" sz="1800" dirty="0"/>
-              <a:t>Students are classified into different mental health levels based on prediction results.</a:t>
-            </a:r>
-            <a:endParaRPr lang="en-US" sz="1800" dirty="0"/>
-          </a:p>
-          <a:p>
-            <a:r>
-              <a:rPr lang="en-US" sz="1800" dirty="0"/>
-              <a:t>An AI chatbot using Natural Language Processing (NLP) interacts with students and provides basic guidance.</a:t>
-            </a:r>
-            <a:endParaRPr lang="en-US" sz="1800" dirty="0"/>
-          </a:p>
-          <a:p>
-            <a:r>
-              <a:rPr lang="en-US" sz="1800" dirty="0"/>
-              <a:t>The system is implemented as a web application using the Django framework.</a:t>
-            </a:r>
-            <a:endParaRPr lang="en-US" sz="1800" dirty="0"/>
-          </a:p>
-          <a:p>
-            <a:r>
-              <a:rPr lang="en-US" sz="1800" dirty="0"/>
-              <a:t>User privacy and anonymity are maintained to encourage honest interaction.</a:t>
-            </a:r>
-            <a:endParaRPr lang="en-US" sz="1800" dirty="0"/>
-          </a:p>
-          <a:p>
-            <a:r>
-              <a:rPr lang="en-US" sz="1800" dirty="0"/>
-              <a:t>The system supports early detection of mental health issues and reduces manual counseling effort.</a:t>
-            </a:r>
-            <a:endParaRPr lang="en-US" sz="1800" dirty="0"/>
-          </a:p>
-          <a:p>
-            <a:r>
-              <a:rPr lang="en-US" sz="1800" dirty="0"/>
-              <a:t>The proposed solution is scalable and suitable for future enhancements.</a:t>
-            </a:r>
-            <a:endParaRPr lang="en-US" sz="1800" b="0" i="0" dirty="0">
-              <a:effectLst/>
-            </a:endParaRPr>
-          </a:p>
-        </p:txBody>
-      </p:sp>
-      <p:pic>
-        <p:nvPicPr>
-          <p:cNvPr id="4" name="Picture 3"/>
-          <p:cNvPicPr>
-            <a:picLocks noChangeAspect="1"/>
-          </p:cNvPicPr>
-          <p:nvPr/>
-        </p:nvPicPr>
-        <p:blipFill rotWithShape="1">
-          <a:blip r:embed="rId1"/>
-          <a:srcRect r="5721" b="8394"/>
-          <a:stretch>
-            <a:fillRect/>
-          </a:stretch>
-        </p:blipFill>
-        <p:spPr>
-          <a:xfrm>
-            <a:off x="10471514" y="365124"/>
-            <a:ext cx="1433006" cy="1325563"/>
-          </a:xfrm>
-          <a:prstGeom prst="rect">
-            <a:avLst/>
-          </a:prstGeom>
-        </p:spPr>
-      </p:pic>
+          <a:p>
+            <a:r>
+              <a:rPr lang="en-US" altLang="en-GB" sz="2000"/>
+              <a:t>A mobile application version can be developed so users can access mental health support anytime and anywhere.</a:t>
+            </a:r>
+            <a:endParaRPr lang="en-US" altLang="en-GB" sz="2000"/>
+          </a:p>
+          <a:p>
+            <a:r>
+              <a:rPr lang="en-US" altLang="en-GB" sz="2000"/>
+              <a:t>The chatbot can be improved using advanced NLP and conversational AI to provide more personalized and human-like responses.</a:t>
+            </a:r>
+            <a:endParaRPr lang="en-US" altLang="en-GB" sz="2000"/>
+          </a:p>
+          <a:p>
+            <a:r>
+              <a:rPr lang="en-US" altLang="en-GB" sz="2000"/>
+              <a:t>The system can be integrated with wearable devices or health tracking apps to monitor stress levels, sleep patterns, and physical activity.</a:t>
+            </a:r>
+            <a:endParaRPr lang="en-US" altLang="en-GB" sz="2000"/>
+          </a:p>
+          <a:p>
+            <a:r>
+              <a:rPr lang="en-US" altLang="en-GB" sz="2000"/>
+              <a:t>The system can be enhanced by using advanced machine learning and deep learning models to improve the accuracy of mental health prediction.</a:t>
+            </a:r>
+            <a:endParaRPr lang="en-US" altLang="en-GB" sz="2000"/>
+          </a:p>
+          <a:p>
+            <a:r>
+              <a:rPr lang="en-US" altLang="en-GB" sz="2000"/>
+              <a:t>Additional wellness activities, games, and meditation programs can be added to improve user engagement and mental relaxation.</a:t>
+            </a:r>
+            <a:endParaRPr lang="en-US" altLang="en-GB" sz="2000"/>
+          </a:p>
+        </p:txBody>
+      </p:sp>
     </p:spTree>
   </p:cSld>
   <p:clrMapOvr>
@@ -3788,1073 +3683,7 @@
 </p:sld>
 </file>
 
-<file path=ppt/slides/slide4.xml><?xml version="1.0" encoding="utf-8"?>
-<p:sld xmlns:a="http://schemas.openxmlformats.org/drawingml/2006/main" xmlns:r="http://schemas.openxmlformats.org/officeDocument/2006/relationships" xmlns:p="http://schemas.openxmlformats.org/presentationml/2006/main">
-  <p:cSld>
-    <p:spTree>
-      <p:nvGrpSpPr>
-        <p:cNvPr id="1" name=""/>
-        <p:cNvGrpSpPr/>
-        <p:nvPr/>
-      </p:nvGrpSpPr>
-      <p:grpSpPr>
-        <a:xfrm>
-          <a:off x="0" y="0"/>
-          <a:ext cx="0" cy="0"/>
-          <a:chOff x="0" y="0"/>
-          <a:chExt cx="0" cy="0"/>
-        </a:xfrm>
-      </p:grpSpPr>
-      <p:sp>
-        <p:nvSpPr>
-          <p:cNvPr id="2" name="Title 1"/>
-          <p:cNvSpPr>
-            <a:spLocks noGrp="1"/>
-          </p:cNvSpPr>
-          <p:nvPr>
-            <p:ph type="title"/>
-          </p:nvPr>
-        </p:nvSpPr>
-        <p:spPr>
-          <a:xfrm>
-            <a:off x="838200" y="365125"/>
-            <a:ext cx="8950036" cy="1325563"/>
-          </a:xfrm>
-        </p:spPr>
-        <p:txBody>
-          <a:bodyPr/>
-          <a:lstStyle/>
-          <a:p>
-            <a:r>
-              <a:rPr lang="en-IN" dirty="0"/>
-              <a:t>MERIT OF THE PROBLEM</a:t>
-            </a:r>
-            <a:endParaRPr lang="en-IN" dirty="0"/>
-          </a:p>
-        </p:txBody>
-      </p:sp>
-      <p:sp>
-        <p:nvSpPr>
-          <p:cNvPr id="3" name="Content Placeholder 2"/>
-          <p:cNvSpPr>
-            <a:spLocks noGrp="1"/>
-          </p:cNvSpPr>
-          <p:nvPr>
-            <p:ph idx="1"/>
-          </p:nvPr>
-        </p:nvSpPr>
-        <p:spPr/>
-        <p:txBody>
-          <a:bodyPr>
-            <a:normAutofit/>
-          </a:bodyPr>
-          <a:lstStyle/>
-          <a:p>
-            <a:r>
-              <a:rPr lang="en-US" sz="1800" dirty="0"/>
-              <a:t>1. </a:t>
-            </a:r>
-            <a:r>
-              <a:rPr lang="en-US" sz="1800" b="1" dirty="0"/>
-              <a:t>Early Mental Health Detection </a:t>
-            </a:r>
-            <a:r>
-              <a:rPr lang="en-US" sz="1800" dirty="0"/>
-              <a:t>The system helps in identifying stress, anxiety, and depression at an early stage using self-assessment data, which allows timely support for students.</a:t>
-            </a:r>
-            <a:endParaRPr lang="en-US" sz="1800" dirty="0"/>
-          </a:p>
-          <a:p>
-            <a:r>
-              <a:rPr lang="en-US" sz="1800" dirty="0"/>
-              <a:t>2. </a:t>
-            </a:r>
-            <a:r>
-              <a:rPr lang="en-US" sz="1800" b="1" dirty="0"/>
-              <a:t>Accurate Assessment Using Machine Learning </a:t>
-            </a:r>
-            <a:r>
-              <a:rPr lang="en-US" sz="1800" dirty="0"/>
-              <a:t>By using Machine Learning classification models, the project provides reliable and data-driven mental health predictions with better accuracy than manual methods.</a:t>
-            </a:r>
-            <a:endParaRPr lang="en-US" sz="1800" dirty="0"/>
-          </a:p>
-          <a:p>
-            <a:r>
-              <a:rPr lang="en-US" sz="1800" dirty="0"/>
-              <a:t>3. </a:t>
-            </a:r>
-            <a:r>
-              <a:rPr lang="en-US" sz="1800" b="1" dirty="0"/>
-              <a:t>24/7 Support Through AI Chatbot </a:t>
-            </a:r>
-            <a:r>
-              <a:rPr lang="en-US" sz="1800" dirty="0"/>
-              <a:t>The AI chatbot is available at all times, enabling students to share their feelings and receive guidance whenever needed.</a:t>
-            </a:r>
-            <a:endParaRPr lang="en-US" sz="1800" dirty="0"/>
-          </a:p>
-          <a:p>
-            <a:r>
-              <a:rPr lang="en-US" sz="1800" dirty="0"/>
-              <a:t>4. </a:t>
-            </a:r>
-            <a:r>
-              <a:rPr lang="en-US" sz="1800" b="1" dirty="0"/>
-              <a:t>User Privacy and Anonymity </a:t>
-            </a:r>
-            <a:r>
-              <a:rPr lang="en-US" sz="1800" dirty="0"/>
-              <a:t>Students can interact with the system without revealing their identity, which encourages honest responses and reduces fear of judgment.</a:t>
-            </a:r>
-            <a:endParaRPr lang="en-US" sz="1800" dirty="0"/>
-          </a:p>
-          <a:p>
-            <a:r>
-              <a:rPr lang="en-US" sz="1800" dirty="0"/>
-              <a:t>5. </a:t>
-            </a:r>
-            <a:r>
-              <a:rPr lang="en-US" sz="1800" b="1" dirty="0"/>
-              <a:t>Easy-to-Use Web Interface </a:t>
-            </a:r>
-            <a:r>
-              <a:rPr lang="en-US" sz="1800" dirty="0"/>
-              <a:t>The web application is simple and user-friendly, making it accessible even for students with minimal technical knowledge.</a:t>
-            </a:r>
-            <a:endParaRPr lang="en-US" sz="1800" dirty="0"/>
-          </a:p>
-          <a:p>
-            <a:r>
-              <a:rPr lang="en-US" sz="1800" dirty="0"/>
-              <a:t>6. </a:t>
-            </a:r>
-            <a:r>
-              <a:rPr lang="en-US" sz="1800" b="1" dirty="0"/>
-              <a:t>Reduced Dependency on Manual Counseling </a:t>
-            </a:r>
-            <a:r>
-              <a:rPr lang="en-US" sz="1800" dirty="0"/>
-              <a:t>The system minimizes the need for continuous human intervention by automating initial mental health screening.</a:t>
-            </a:r>
-            <a:endParaRPr lang="en-US" sz="1800" b="0" i="0" dirty="0">
-              <a:effectLst/>
-            </a:endParaRPr>
-          </a:p>
-        </p:txBody>
-      </p:sp>
-      <p:pic>
-        <p:nvPicPr>
-          <p:cNvPr id="4" name="Picture 3"/>
-          <p:cNvPicPr>
-            <a:picLocks noChangeAspect="1"/>
-          </p:cNvPicPr>
-          <p:nvPr/>
-        </p:nvPicPr>
-        <p:blipFill rotWithShape="1">
-          <a:blip r:embed="rId1"/>
-          <a:srcRect r="5721" b="8394"/>
-          <a:stretch>
-            <a:fillRect/>
-          </a:stretch>
-        </p:blipFill>
-        <p:spPr>
-          <a:xfrm>
-            <a:off x="10471514" y="365124"/>
-            <a:ext cx="1433006" cy="1325563"/>
-          </a:xfrm>
-          <a:prstGeom prst="rect">
-            <a:avLst/>
-          </a:prstGeom>
-        </p:spPr>
-      </p:pic>
-    </p:spTree>
-  </p:cSld>
-  <p:clrMapOvr>
-    <a:masterClrMapping/>
-  </p:clrMapOvr>
-</p:sld>
-</file>
-
-<file path=ppt/slides/slide5.xml><?xml version="1.0" encoding="utf-8"?>
-<p:sld xmlns:a="http://schemas.openxmlformats.org/drawingml/2006/main" xmlns:r="http://schemas.openxmlformats.org/officeDocument/2006/relationships" xmlns:p="http://schemas.openxmlformats.org/presentationml/2006/main">
-  <p:cSld>
-    <p:spTree>
-      <p:nvGrpSpPr>
-        <p:cNvPr id="1" name=""/>
-        <p:cNvGrpSpPr/>
-        <p:nvPr/>
-      </p:nvGrpSpPr>
-      <p:grpSpPr>
-        <a:xfrm>
-          <a:off x="0" y="0"/>
-          <a:ext cx="0" cy="0"/>
-          <a:chOff x="0" y="0"/>
-          <a:chExt cx="0" cy="0"/>
-        </a:xfrm>
-      </p:grpSpPr>
-      <p:sp>
-        <p:nvSpPr>
-          <p:cNvPr id="2" name="Title 1"/>
-          <p:cNvSpPr>
-            <a:spLocks noGrp="1"/>
-          </p:cNvSpPr>
-          <p:nvPr>
-            <p:ph type="title"/>
-          </p:nvPr>
-        </p:nvSpPr>
-        <p:spPr>
-          <a:xfrm>
-            <a:off x="838200" y="365125"/>
-            <a:ext cx="8950036" cy="1325563"/>
-          </a:xfrm>
-        </p:spPr>
-        <p:txBody>
-          <a:bodyPr/>
-          <a:lstStyle/>
-          <a:p>
-            <a:r>
-              <a:rPr lang="en-IN" dirty="0"/>
-              <a:t>BLOCK DIAGRAM</a:t>
-            </a:r>
-            <a:endParaRPr lang="en-IN" dirty="0"/>
-          </a:p>
-        </p:txBody>
-      </p:sp>
-      <p:pic>
-        <p:nvPicPr>
-          <p:cNvPr id="4" name="Picture 3"/>
-          <p:cNvPicPr>
-            <a:picLocks noChangeAspect="1"/>
-          </p:cNvPicPr>
-          <p:nvPr/>
-        </p:nvPicPr>
-        <p:blipFill rotWithShape="1">
-          <a:blip r:embed="rId1"/>
-          <a:srcRect r="5721" b="8394"/>
-          <a:stretch>
-            <a:fillRect/>
-          </a:stretch>
-        </p:blipFill>
-        <p:spPr>
-          <a:xfrm>
-            <a:off x="10471514" y="365124"/>
-            <a:ext cx="1433006" cy="1325563"/>
-          </a:xfrm>
-          <a:prstGeom prst="rect">
-            <a:avLst/>
-          </a:prstGeom>
-        </p:spPr>
-      </p:pic>
-      <p:pic>
-        <p:nvPicPr>
-          <p:cNvPr id="7" name="Picture 6"/>
-          <p:cNvPicPr>
-            <a:picLocks noChangeAspect="1"/>
-          </p:cNvPicPr>
-          <p:nvPr/>
-        </p:nvPicPr>
-        <p:blipFill>
-          <a:blip r:embed="rId2">
-            <a:extLst>
-              <a:ext uri="{28A0092B-C50C-407E-A947-70E740481C1C}">
-                <a14:useLocalDpi xmlns:a14="http://schemas.microsoft.com/office/drawing/2010/main" val="0"/>
-              </a:ext>
-            </a:extLst>
-          </a:blip>
-          <a:stretch>
-            <a:fillRect/>
-          </a:stretch>
-        </p:blipFill>
-        <p:spPr>
-          <a:xfrm>
-            <a:off x="3505200" y="1330037"/>
-            <a:ext cx="5181599" cy="5070475"/>
-          </a:xfrm>
-          <a:prstGeom prst="rect">
-            <a:avLst/>
-          </a:prstGeom>
-        </p:spPr>
-      </p:pic>
-    </p:spTree>
-  </p:cSld>
-  <p:clrMapOvr>
-    <a:masterClrMapping/>
-  </p:clrMapOvr>
-</p:sld>
-</file>
-
-<file path=ppt/slides/slide6.xml><?xml version="1.0" encoding="utf-8"?>
-<p:sld xmlns:a="http://schemas.openxmlformats.org/drawingml/2006/main" xmlns:r="http://schemas.openxmlformats.org/officeDocument/2006/relationships" xmlns:p="http://schemas.openxmlformats.org/presentationml/2006/main">
-  <p:cSld>
-    <p:spTree>
-      <p:nvGrpSpPr>
-        <p:cNvPr id="1" name=""/>
-        <p:cNvGrpSpPr/>
-        <p:nvPr/>
-      </p:nvGrpSpPr>
-      <p:grpSpPr>
-        <a:xfrm>
-          <a:off x="0" y="0"/>
-          <a:ext cx="0" cy="0"/>
-          <a:chOff x="0" y="0"/>
-          <a:chExt cx="0" cy="0"/>
-        </a:xfrm>
-      </p:grpSpPr>
-      <p:sp>
-        <p:nvSpPr>
-          <p:cNvPr id="2" name="Title 1"/>
-          <p:cNvSpPr>
-            <a:spLocks noGrp="1"/>
-          </p:cNvSpPr>
-          <p:nvPr>
-            <p:ph type="title"/>
-          </p:nvPr>
-        </p:nvSpPr>
-        <p:spPr>
-          <a:xfrm>
-            <a:off x="838200" y="365125"/>
-            <a:ext cx="8950036" cy="1325563"/>
-          </a:xfrm>
-        </p:spPr>
-        <p:txBody>
-          <a:bodyPr/>
-          <a:lstStyle/>
-          <a:p>
-            <a:r>
-              <a:rPr lang="en-IN" dirty="0"/>
-              <a:t>MODEL DESCRIPTION</a:t>
-            </a:r>
-            <a:endParaRPr lang="en-IN" dirty="0"/>
-          </a:p>
-        </p:txBody>
-      </p:sp>
-      <p:pic>
-        <p:nvPicPr>
-          <p:cNvPr id="4" name="Picture 3"/>
-          <p:cNvPicPr>
-            <a:picLocks noChangeAspect="1"/>
-          </p:cNvPicPr>
-          <p:nvPr/>
-        </p:nvPicPr>
-        <p:blipFill rotWithShape="1">
-          <a:blip r:embed="rId1"/>
-          <a:srcRect r="5721" b="8394"/>
-          <a:stretch>
-            <a:fillRect/>
-          </a:stretch>
-        </p:blipFill>
-        <p:spPr>
-          <a:xfrm>
-            <a:off x="10471514" y="365124"/>
-            <a:ext cx="1433006" cy="1325563"/>
-          </a:xfrm>
-          <a:prstGeom prst="rect">
-            <a:avLst/>
-          </a:prstGeom>
-        </p:spPr>
-      </p:pic>
-      <p:sp>
-        <p:nvSpPr>
-          <p:cNvPr id="9" name="Rectangle 4"/>
-          <p:cNvSpPr>
-            <a:spLocks noGrp="1" noChangeArrowheads="1"/>
-          </p:cNvSpPr>
-          <p:nvPr>
-            <p:ph idx="1"/>
-          </p:nvPr>
-        </p:nvSpPr>
-        <p:spPr bwMode="auto">
-          <a:xfrm>
-            <a:off x="838200" y="1877636"/>
-            <a:ext cx="10411691" cy="4247317"/>
-          </a:xfrm>
-          <a:prstGeom prst="rect">
-            <a:avLst/>
-          </a:prstGeom>
-          <a:noFill/>
-          <a:ln>
-            <a:noFill/>
-          </a:ln>
-          <a:effectLst/>
-          <a:extLst>
-            <a:ext uri="{909E8E84-426E-40DD-AFC4-6F175D3DCCD1}">
-              <a14:hiddenFill xmlns:a14="http://schemas.microsoft.com/office/drawing/2010/main">
-                <a:solidFill>
-                  <a:schemeClr val="accent1"/>
-                </a:solidFill>
-              </a14:hiddenFill>
-            </a:ext>
-            <a:ext uri="{91240B29-F687-4F45-9708-019B960494DF}">
-              <a14:hiddenLine xmlns:a14="http://schemas.microsoft.com/office/drawing/2010/main" w="9525">
-                <a:solidFill>
-                  <a:schemeClr val="tx1"/>
-                </a:solidFill>
-                <a:miter lim="800000"/>
-                <a:headEnd/>
-                <a:tailEnd/>
-              </a14:hiddenLine>
-            </a:ext>
-            <a:ext uri="{AF507438-7753-43E0-B8FC-AC1667EBCBE1}">
-              <a14:hiddenEffects xmlns:a14="http://schemas.microsoft.com/office/drawing/2010/main">
-                <a:effectLst>
-                  <a:outerShdw dist="35921" dir="2700000" algn="ctr" rotWithShape="0">
-                    <a:schemeClr val="bg2"/>
-                  </a:outerShdw>
-                </a:effectLst>
-              </a14:hiddenEffects>
-            </a:ext>
-          </a:extLst>
-        </p:spPr>
-        <p:txBody>
-          <a:bodyPr vert="horz" wrap="square" lIns="91440" tIns="45720" rIns="91440" bIns="45720" numCol="1" anchor="ctr" anchorCtr="0" compatLnSpc="1">
-            <a:spAutoFit/>
-          </a:bodyPr>
-          <a:lstStyle/>
-          <a:p>
-            <a:pPr eaLnBrk="0" fontAlgn="base" hangingPunct="0">
-              <a:lnSpc>
-                <a:spcPct val="100000"/>
-              </a:lnSpc>
-              <a:spcBef>
-                <a:spcPct val="0"/>
-              </a:spcBef>
-              <a:spcAft>
-                <a:spcPct val="0"/>
-              </a:spcAft>
-            </a:pPr>
-            <a:r>
-              <a:rPr kumimoji="0" lang="en-US" altLang="en-US" sz="1800" b="0" i="0" u="none" strike="noStrike" cap="none" normalizeH="0" baseline="0" dirty="0">
-                <a:ln>
-                  <a:noFill/>
-                </a:ln>
-                <a:solidFill>
-                  <a:schemeClr val="tx1"/>
-                </a:solidFill>
-                <a:effectLst/>
-                <a:latin typeface="Arial" panose="020B0604020202020204" pitchFamily="34" charset="0"/>
-              </a:rPr>
-              <a:t>The system uses a </a:t>
-            </a:r>
-            <a:r>
-              <a:rPr kumimoji="0" lang="en-US" altLang="en-US" sz="1800" b="1" i="0" u="none" strike="noStrike" cap="none" normalizeH="0" baseline="0" dirty="0">
-                <a:ln>
-                  <a:noFill/>
-                </a:ln>
-                <a:solidFill>
-                  <a:schemeClr val="tx1"/>
-                </a:solidFill>
-                <a:effectLst/>
-                <a:latin typeface="Arial" panose="020B0604020202020204" pitchFamily="34" charset="0"/>
-              </a:rPr>
-              <a:t>Machine Learning classification model</a:t>
-            </a:r>
-            <a:r>
-              <a:rPr kumimoji="0" lang="en-US" altLang="en-US" sz="1800" b="0" i="0" u="none" strike="noStrike" cap="none" normalizeH="0" baseline="0" dirty="0">
-                <a:ln>
-                  <a:noFill/>
-                </a:ln>
-                <a:solidFill>
-                  <a:schemeClr val="tx1"/>
-                </a:solidFill>
-                <a:effectLst/>
-                <a:latin typeface="Arial" panose="020B0604020202020204" pitchFamily="34" charset="0"/>
-              </a:rPr>
-              <a:t> to assess students’ mental health conditions.</a:t>
-            </a:r>
-            <a:endParaRPr kumimoji="0" lang="en-US" altLang="en-US" sz="1800" b="0" i="0" u="none" strike="noStrike" cap="none" normalizeH="0" baseline="0" dirty="0">
-              <a:ln>
-                <a:noFill/>
-              </a:ln>
-              <a:solidFill>
-                <a:schemeClr val="tx1"/>
-              </a:solidFill>
-              <a:effectLst/>
-              <a:latin typeface="Arial" panose="020B0604020202020204" pitchFamily="34" charset="0"/>
-            </a:endParaRPr>
-          </a:p>
-          <a:p>
-            <a:pPr eaLnBrk="0" fontAlgn="base" hangingPunct="0">
-              <a:lnSpc>
-                <a:spcPct val="100000"/>
-              </a:lnSpc>
-              <a:spcBef>
-                <a:spcPct val="0"/>
-              </a:spcBef>
-              <a:spcAft>
-                <a:spcPct val="0"/>
-              </a:spcAft>
-            </a:pPr>
-            <a:r>
-              <a:rPr kumimoji="0" lang="en-US" altLang="en-US" sz="1800" b="1" i="0" u="none" strike="noStrike" cap="none" normalizeH="0" baseline="0" dirty="0">
-                <a:ln>
-                  <a:noFill/>
-                </a:ln>
-                <a:solidFill>
-                  <a:schemeClr val="tx1"/>
-                </a:solidFill>
-                <a:effectLst/>
-                <a:latin typeface="Arial" panose="020B0604020202020204" pitchFamily="34" charset="0"/>
-              </a:rPr>
-              <a:t>Logistic Regression</a:t>
-            </a:r>
-            <a:r>
-              <a:rPr kumimoji="0" lang="en-US" altLang="en-US" sz="1800" b="0" i="0" u="none" strike="noStrike" cap="none" normalizeH="0" baseline="0" dirty="0">
-                <a:ln>
-                  <a:noFill/>
-                </a:ln>
-                <a:solidFill>
-                  <a:schemeClr val="tx1"/>
-                </a:solidFill>
-                <a:effectLst/>
-                <a:latin typeface="Arial" panose="020B0604020202020204" pitchFamily="34" charset="0"/>
-              </a:rPr>
-              <a:t> is employed as the primary model for predicting mental health levels.</a:t>
-            </a:r>
-            <a:endParaRPr kumimoji="0" lang="en-US" altLang="en-US" sz="1800" b="0" i="0" u="none" strike="noStrike" cap="none" normalizeH="0" baseline="0" dirty="0">
-              <a:ln>
-                <a:noFill/>
-              </a:ln>
-              <a:solidFill>
-                <a:schemeClr val="tx1"/>
-              </a:solidFill>
-              <a:effectLst/>
-              <a:latin typeface="Arial" panose="020B0604020202020204" pitchFamily="34" charset="0"/>
-            </a:endParaRPr>
-          </a:p>
-          <a:p>
-            <a:pPr eaLnBrk="0" fontAlgn="base" hangingPunct="0">
-              <a:lnSpc>
-                <a:spcPct val="100000"/>
-              </a:lnSpc>
-              <a:spcBef>
-                <a:spcPct val="0"/>
-              </a:spcBef>
-              <a:spcAft>
-                <a:spcPct val="0"/>
-              </a:spcAft>
-            </a:pPr>
-            <a:r>
-              <a:rPr kumimoji="0" lang="en-US" altLang="en-US" sz="1800" b="0" i="0" u="none" strike="noStrike" cap="none" normalizeH="0" baseline="0" dirty="0">
-                <a:ln>
-                  <a:noFill/>
-                </a:ln>
-                <a:solidFill>
-                  <a:schemeClr val="tx1"/>
-                </a:solidFill>
-                <a:effectLst/>
-                <a:latin typeface="Arial" panose="020B0604020202020204" pitchFamily="34" charset="0"/>
-              </a:rPr>
-              <a:t>The model operates on </a:t>
-            </a:r>
-            <a:r>
-              <a:rPr kumimoji="0" lang="en-US" altLang="en-US" sz="1800" b="1" i="0" u="none" strike="noStrike" cap="none" normalizeH="0" baseline="0" dirty="0">
-                <a:ln>
-                  <a:noFill/>
-                </a:ln>
-                <a:solidFill>
-                  <a:schemeClr val="tx1"/>
-                </a:solidFill>
-                <a:effectLst/>
-                <a:latin typeface="Arial" panose="020B0604020202020204" pitchFamily="34" charset="0"/>
-              </a:rPr>
-              <a:t>self-assessment questionnaire data</a:t>
-            </a:r>
-            <a:r>
-              <a:rPr kumimoji="0" lang="en-US" altLang="en-US" sz="1800" b="0" i="0" u="none" strike="noStrike" cap="none" normalizeH="0" baseline="0" dirty="0">
-                <a:ln>
-                  <a:noFill/>
-                </a:ln>
-                <a:solidFill>
-                  <a:schemeClr val="tx1"/>
-                </a:solidFill>
-                <a:effectLst/>
-                <a:latin typeface="Arial" panose="020B0604020202020204" pitchFamily="34" charset="0"/>
-              </a:rPr>
-              <a:t> collected from students.</a:t>
-            </a:r>
-            <a:endParaRPr kumimoji="0" lang="en-US" altLang="en-US" sz="1800" b="0" i="0" u="none" strike="noStrike" cap="none" normalizeH="0" baseline="0" dirty="0">
-              <a:ln>
-                <a:noFill/>
-              </a:ln>
-              <a:solidFill>
-                <a:schemeClr val="tx1"/>
-              </a:solidFill>
-              <a:effectLst/>
-              <a:latin typeface="Arial" panose="020B0604020202020204" pitchFamily="34" charset="0"/>
-            </a:endParaRPr>
-          </a:p>
-          <a:p>
-            <a:pPr eaLnBrk="0" fontAlgn="base" hangingPunct="0">
-              <a:lnSpc>
-                <a:spcPct val="100000"/>
-              </a:lnSpc>
-              <a:spcBef>
-                <a:spcPct val="0"/>
-              </a:spcBef>
-              <a:spcAft>
-                <a:spcPct val="0"/>
-              </a:spcAft>
-            </a:pPr>
-            <a:r>
-              <a:rPr kumimoji="0" lang="en-US" altLang="en-US" sz="1800" b="0" i="0" u="none" strike="noStrike" cap="none" normalizeH="0" baseline="0" dirty="0">
-                <a:ln>
-                  <a:noFill/>
-                </a:ln>
-                <a:solidFill>
-                  <a:schemeClr val="tx1"/>
-                </a:solidFill>
-                <a:effectLst/>
-                <a:latin typeface="Arial" panose="020B0604020202020204" pitchFamily="34" charset="0"/>
-              </a:rPr>
-              <a:t>Input features include responses related to </a:t>
-            </a:r>
-            <a:r>
-              <a:rPr kumimoji="0" lang="en-US" altLang="en-US" sz="1800" b="1" i="0" u="none" strike="noStrike" cap="none" normalizeH="0" baseline="0" dirty="0">
-                <a:ln>
-                  <a:noFill/>
-                </a:ln>
-                <a:solidFill>
-                  <a:schemeClr val="tx1"/>
-                </a:solidFill>
-                <a:effectLst/>
-                <a:latin typeface="Arial" panose="020B0604020202020204" pitchFamily="34" charset="0"/>
-              </a:rPr>
-              <a:t>stress, anxiety, mood, sleep patterns, and concentration</a:t>
-            </a:r>
-            <a:r>
-              <a:rPr kumimoji="0" lang="en-US" altLang="en-US" sz="1800" b="0" i="0" u="none" strike="noStrike" cap="none" normalizeH="0" baseline="0" dirty="0">
-                <a:ln>
-                  <a:noFill/>
-                </a:ln>
-                <a:solidFill>
-                  <a:schemeClr val="tx1"/>
-                </a:solidFill>
-                <a:effectLst/>
-                <a:latin typeface="Arial" panose="020B0604020202020204" pitchFamily="34" charset="0"/>
-              </a:rPr>
-              <a:t>.</a:t>
-            </a:r>
-            <a:endParaRPr kumimoji="0" lang="en-US" altLang="en-US" sz="1800" b="0" i="0" u="none" strike="noStrike" cap="none" normalizeH="0" baseline="0" dirty="0">
-              <a:ln>
-                <a:noFill/>
-              </a:ln>
-              <a:solidFill>
-                <a:schemeClr val="tx1"/>
-              </a:solidFill>
-              <a:effectLst/>
-              <a:latin typeface="Arial" panose="020B0604020202020204" pitchFamily="34" charset="0"/>
-            </a:endParaRPr>
-          </a:p>
-          <a:p>
-            <a:pPr eaLnBrk="0" fontAlgn="base" hangingPunct="0">
-              <a:lnSpc>
-                <a:spcPct val="100000"/>
-              </a:lnSpc>
-              <a:spcBef>
-                <a:spcPct val="0"/>
-              </a:spcBef>
-              <a:spcAft>
-                <a:spcPct val="0"/>
-              </a:spcAft>
-            </a:pPr>
-            <a:r>
-              <a:rPr kumimoji="0" lang="en-US" altLang="en-US" sz="1800" b="0" i="0" u="none" strike="noStrike" cap="none" normalizeH="0" baseline="0" dirty="0">
-                <a:ln>
-                  <a:noFill/>
-                </a:ln>
-                <a:solidFill>
-                  <a:schemeClr val="tx1"/>
-                </a:solidFill>
-                <a:effectLst/>
-                <a:latin typeface="Arial" panose="020B0604020202020204" pitchFamily="34" charset="0"/>
-              </a:rPr>
-              <a:t>Collected data is </a:t>
-            </a:r>
-            <a:r>
-              <a:rPr kumimoji="0" lang="en-US" altLang="en-US" sz="1800" b="1" i="0" u="none" strike="noStrike" cap="none" normalizeH="0" baseline="0" dirty="0">
-                <a:ln>
-                  <a:noFill/>
-                </a:ln>
-                <a:solidFill>
-                  <a:schemeClr val="tx1"/>
-                </a:solidFill>
-                <a:effectLst/>
-                <a:latin typeface="Arial" panose="020B0604020202020204" pitchFamily="34" charset="0"/>
-              </a:rPr>
-              <a:t>preprocessed</a:t>
-            </a:r>
-            <a:r>
-              <a:rPr kumimoji="0" lang="en-US" altLang="en-US" sz="1800" b="0" i="0" u="none" strike="noStrike" cap="none" normalizeH="0" baseline="0" dirty="0">
-                <a:ln>
-                  <a:noFill/>
-                </a:ln>
-                <a:solidFill>
-                  <a:schemeClr val="tx1"/>
-                </a:solidFill>
-                <a:effectLst/>
-                <a:latin typeface="Arial" panose="020B0604020202020204" pitchFamily="34" charset="0"/>
-              </a:rPr>
-              <a:t> by removing noise, handling missing values, and converting text into numerical form.</a:t>
-            </a:r>
-            <a:endParaRPr kumimoji="0" lang="en-US" altLang="en-US" sz="1800" b="0" i="0" u="none" strike="noStrike" cap="none" normalizeH="0" baseline="0" dirty="0">
-              <a:ln>
-                <a:noFill/>
-              </a:ln>
-              <a:solidFill>
-                <a:schemeClr val="tx1"/>
-              </a:solidFill>
-              <a:effectLst/>
-              <a:latin typeface="Arial" panose="020B0604020202020204" pitchFamily="34" charset="0"/>
-            </a:endParaRPr>
-          </a:p>
-          <a:p>
-            <a:pPr eaLnBrk="0" fontAlgn="base" hangingPunct="0">
-              <a:lnSpc>
-                <a:spcPct val="100000"/>
-              </a:lnSpc>
-              <a:spcBef>
-                <a:spcPct val="0"/>
-              </a:spcBef>
-              <a:spcAft>
-                <a:spcPct val="0"/>
-              </a:spcAft>
-            </a:pPr>
-            <a:r>
-              <a:rPr kumimoji="0" lang="en-US" altLang="en-US" sz="1800" b="0" i="0" u="none" strike="noStrike" cap="none" normalizeH="0" baseline="0" dirty="0">
-                <a:ln>
-                  <a:noFill/>
-                </a:ln>
-                <a:solidFill>
-                  <a:schemeClr val="tx1"/>
-                </a:solidFill>
-                <a:effectLst/>
-                <a:latin typeface="Arial" panose="020B0604020202020204" pitchFamily="34" charset="0"/>
-              </a:rPr>
-              <a:t>The dataset is split into </a:t>
-            </a:r>
-            <a:r>
-              <a:rPr kumimoji="0" lang="en-US" altLang="en-US" sz="1800" b="1" i="0" u="none" strike="noStrike" cap="none" normalizeH="0" baseline="0" dirty="0">
-                <a:ln>
-                  <a:noFill/>
-                </a:ln>
-                <a:solidFill>
-                  <a:schemeClr val="tx1"/>
-                </a:solidFill>
-                <a:effectLst/>
-                <a:latin typeface="Arial" panose="020B0604020202020204" pitchFamily="34" charset="0"/>
-              </a:rPr>
-              <a:t>training and testing sets</a:t>
-            </a:r>
-            <a:r>
-              <a:rPr kumimoji="0" lang="en-US" altLang="en-US" sz="1800" b="0" i="0" u="none" strike="noStrike" cap="none" normalizeH="0" baseline="0" dirty="0">
-                <a:ln>
-                  <a:noFill/>
-                </a:ln>
-                <a:solidFill>
-                  <a:schemeClr val="tx1"/>
-                </a:solidFill>
-                <a:effectLst/>
-                <a:latin typeface="Arial" panose="020B0604020202020204" pitchFamily="34" charset="0"/>
-              </a:rPr>
-              <a:t> to evaluate model performance.</a:t>
-            </a:r>
-            <a:endParaRPr kumimoji="0" lang="en-US" altLang="en-US" sz="1800" b="0" i="0" u="none" strike="noStrike" cap="none" normalizeH="0" baseline="0" dirty="0">
-              <a:ln>
-                <a:noFill/>
-              </a:ln>
-              <a:solidFill>
-                <a:schemeClr val="tx1"/>
-              </a:solidFill>
-              <a:effectLst/>
-              <a:latin typeface="Arial" panose="020B0604020202020204" pitchFamily="34" charset="0"/>
-            </a:endParaRPr>
-          </a:p>
-          <a:p>
-            <a:pPr eaLnBrk="0" fontAlgn="base" hangingPunct="0">
-              <a:lnSpc>
-                <a:spcPct val="100000"/>
-              </a:lnSpc>
-              <a:spcBef>
-                <a:spcPct val="0"/>
-              </a:spcBef>
-              <a:spcAft>
-                <a:spcPct val="0"/>
-              </a:spcAft>
-            </a:pPr>
-            <a:r>
-              <a:rPr kumimoji="0" lang="en-US" altLang="en-US" sz="1800" b="0" i="0" u="none" strike="noStrike" cap="none" normalizeH="0" baseline="0" dirty="0">
-                <a:ln>
-                  <a:noFill/>
-                </a:ln>
-                <a:solidFill>
-                  <a:schemeClr val="tx1"/>
-                </a:solidFill>
-                <a:effectLst/>
-                <a:latin typeface="Arial" panose="020B0604020202020204" pitchFamily="34" charset="0"/>
-              </a:rPr>
-              <a:t>The Logistic Regression model learns the relationship between </a:t>
-            </a:r>
-            <a:r>
-              <a:rPr kumimoji="0" lang="en-US" altLang="en-US" sz="1800" b="1" i="0" u="none" strike="noStrike" cap="none" normalizeH="0" baseline="0" dirty="0">
-                <a:ln>
-                  <a:noFill/>
-                </a:ln>
-                <a:solidFill>
-                  <a:schemeClr val="tx1"/>
-                </a:solidFill>
-                <a:effectLst/>
-                <a:latin typeface="Arial" panose="020B0604020202020204" pitchFamily="34" charset="0"/>
-              </a:rPr>
-              <a:t>input features and mental health outcomes</a:t>
-            </a:r>
-            <a:r>
-              <a:rPr kumimoji="0" lang="en-US" altLang="en-US" sz="1800" b="0" i="0" u="none" strike="noStrike" cap="none" normalizeH="0" baseline="0" dirty="0">
-                <a:ln>
-                  <a:noFill/>
-                </a:ln>
-                <a:solidFill>
-                  <a:schemeClr val="tx1"/>
-                </a:solidFill>
-                <a:effectLst/>
-                <a:latin typeface="Arial" panose="020B0604020202020204" pitchFamily="34" charset="0"/>
-              </a:rPr>
-              <a:t>.</a:t>
-            </a:r>
-            <a:endParaRPr kumimoji="0" lang="en-US" altLang="en-US" sz="1800" b="0" i="0" u="none" strike="noStrike" cap="none" normalizeH="0" baseline="0" dirty="0">
-              <a:ln>
-                <a:noFill/>
-              </a:ln>
-              <a:solidFill>
-                <a:schemeClr val="tx1"/>
-              </a:solidFill>
-              <a:effectLst/>
-              <a:latin typeface="Arial" panose="020B0604020202020204" pitchFamily="34" charset="0"/>
-            </a:endParaRPr>
-          </a:p>
-          <a:p>
-            <a:pPr eaLnBrk="0" fontAlgn="base" hangingPunct="0">
-              <a:lnSpc>
-                <a:spcPct val="100000"/>
-              </a:lnSpc>
-              <a:spcBef>
-                <a:spcPct val="0"/>
-              </a:spcBef>
-              <a:spcAft>
-                <a:spcPct val="0"/>
-              </a:spcAft>
-            </a:pPr>
-            <a:r>
-              <a:rPr kumimoji="0" lang="en-US" altLang="en-US" sz="1800" b="0" i="0" u="none" strike="noStrike" cap="none" normalizeH="0" baseline="0" dirty="0">
-                <a:ln>
-                  <a:noFill/>
-                </a:ln>
-                <a:solidFill>
-                  <a:schemeClr val="tx1"/>
-                </a:solidFill>
-                <a:effectLst/>
-                <a:latin typeface="Arial" panose="020B0604020202020204" pitchFamily="34" charset="0"/>
-              </a:rPr>
-              <a:t>Students are classified into </a:t>
-            </a:r>
-            <a:r>
-              <a:rPr kumimoji="0" lang="en-US" altLang="en-US" sz="1800" b="1" i="0" u="none" strike="noStrike" cap="none" normalizeH="0" baseline="0" dirty="0">
-                <a:ln>
-                  <a:noFill/>
-                </a:ln>
-                <a:solidFill>
-                  <a:schemeClr val="tx1"/>
-                </a:solidFill>
-                <a:effectLst/>
-                <a:latin typeface="Arial" panose="020B0604020202020204" pitchFamily="34" charset="0"/>
-              </a:rPr>
-              <a:t>low, moderate, or high-risk categories</a:t>
-            </a:r>
-            <a:r>
-              <a:rPr kumimoji="0" lang="en-US" altLang="en-US" sz="1800" b="0" i="0" u="none" strike="noStrike" cap="none" normalizeH="0" baseline="0" dirty="0">
-                <a:ln>
-                  <a:noFill/>
-                </a:ln>
-                <a:solidFill>
-                  <a:schemeClr val="tx1"/>
-                </a:solidFill>
-                <a:effectLst/>
-                <a:latin typeface="Arial" panose="020B0604020202020204" pitchFamily="34" charset="0"/>
-              </a:rPr>
-              <a:t>.</a:t>
-            </a:r>
-            <a:endParaRPr kumimoji="0" lang="en-US" altLang="en-US" sz="1800" b="0" i="0" u="none" strike="noStrike" cap="none" normalizeH="0" baseline="0" dirty="0">
-              <a:ln>
-                <a:noFill/>
-              </a:ln>
-              <a:solidFill>
-                <a:schemeClr val="tx1"/>
-              </a:solidFill>
-              <a:effectLst/>
-              <a:latin typeface="Arial" panose="020B0604020202020204" pitchFamily="34" charset="0"/>
-            </a:endParaRPr>
-          </a:p>
-          <a:p>
-            <a:pPr eaLnBrk="0" fontAlgn="base" hangingPunct="0">
-              <a:lnSpc>
-                <a:spcPct val="100000"/>
-              </a:lnSpc>
-              <a:spcBef>
-                <a:spcPct val="0"/>
-              </a:spcBef>
-              <a:spcAft>
-                <a:spcPct val="0"/>
-              </a:spcAft>
-            </a:pPr>
-            <a:r>
-              <a:rPr kumimoji="0" lang="en-US" altLang="en-US" sz="1800" b="0" i="0" u="none" strike="noStrike" cap="none" normalizeH="0" baseline="0" dirty="0">
-                <a:ln>
-                  <a:noFill/>
-                </a:ln>
-                <a:solidFill>
-                  <a:schemeClr val="tx1"/>
-                </a:solidFill>
-                <a:effectLst/>
-                <a:latin typeface="Arial" panose="020B0604020202020204" pitchFamily="34" charset="0"/>
-              </a:rPr>
-              <a:t>Prediction results are </a:t>
-            </a:r>
-            <a:r>
-              <a:rPr kumimoji="0" lang="en-US" altLang="en-US" sz="1800" b="1" i="0" u="none" strike="noStrike" cap="none" normalizeH="0" baseline="0" dirty="0">
-                <a:ln>
-                  <a:noFill/>
-                </a:ln>
-                <a:solidFill>
-                  <a:schemeClr val="tx1"/>
-                </a:solidFill>
-                <a:effectLst/>
-                <a:latin typeface="Arial" panose="020B0604020202020204" pitchFamily="34" charset="0"/>
-              </a:rPr>
-              <a:t>securely stored</a:t>
-            </a:r>
-            <a:r>
-              <a:rPr kumimoji="0" lang="en-US" altLang="en-US" sz="1800" b="0" i="0" u="none" strike="noStrike" cap="none" normalizeH="0" baseline="0" dirty="0">
-                <a:ln>
-                  <a:noFill/>
-                </a:ln>
-                <a:solidFill>
-                  <a:schemeClr val="tx1"/>
-                </a:solidFill>
-                <a:effectLst/>
-                <a:latin typeface="Arial" panose="020B0604020202020204" pitchFamily="34" charset="0"/>
-              </a:rPr>
-              <a:t> and displayed in a </a:t>
-            </a:r>
-            <a:r>
-              <a:rPr kumimoji="0" lang="en-US" altLang="en-US" sz="1800" b="1" i="0" u="none" strike="noStrike" cap="none" normalizeH="0" baseline="0" dirty="0">
-                <a:ln>
-                  <a:noFill/>
-                </a:ln>
-                <a:solidFill>
-                  <a:schemeClr val="tx1"/>
-                </a:solidFill>
-                <a:effectLst/>
-                <a:latin typeface="Arial" panose="020B0604020202020204" pitchFamily="34" charset="0"/>
-              </a:rPr>
-              <a:t>user-friendly format</a:t>
-            </a:r>
-            <a:r>
-              <a:rPr kumimoji="0" lang="en-US" altLang="en-US" sz="1800" b="0" i="0" u="none" strike="noStrike" cap="none" normalizeH="0" baseline="0" dirty="0">
-                <a:ln>
-                  <a:noFill/>
-                </a:ln>
-                <a:solidFill>
-                  <a:schemeClr val="tx1"/>
-                </a:solidFill>
-                <a:effectLst/>
-                <a:latin typeface="Arial" panose="020B0604020202020204" pitchFamily="34" charset="0"/>
-              </a:rPr>
-              <a:t>.</a:t>
-            </a:r>
-            <a:endParaRPr kumimoji="0" lang="en-US" altLang="en-US" sz="1800" b="0" i="0" u="none" strike="noStrike" cap="none" normalizeH="0" baseline="0" dirty="0">
-              <a:ln>
-                <a:noFill/>
-              </a:ln>
-              <a:solidFill>
-                <a:schemeClr val="tx1"/>
-              </a:solidFill>
-              <a:effectLst/>
-              <a:latin typeface="Arial" panose="020B0604020202020204" pitchFamily="34" charset="0"/>
-            </a:endParaRPr>
-          </a:p>
-          <a:p>
-            <a:pPr eaLnBrk="0" fontAlgn="base" hangingPunct="0">
-              <a:lnSpc>
-                <a:spcPct val="100000"/>
-              </a:lnSpc>
-              <a:spcBef>
-                <a:spcPct val="0"/>
-              </a:spcBef>
-              <a:spcAft>
-                <a:spcPct val="0"/>
-              </a:spcAft>
-            </a:pPr>
-            <a:r>
-              <a:rPr kumimoji="0" lang="en-US" altLang="en-US" sz="1800" b="0" i="0" u="none" strike="noStrike" cap="none" normalizeH="0" baseline="0" dirty="0">
-                <a:ln>
-                  <a:noFill/>
-                </a:ln>
-                <a:solidFill>
-                  <a:schemeClr val="tx1"/>
-                </a:solidFill>
-                <a:effectLst/>
-                <a:latin typeface="Arial" panose="020B0604020202020204" pitchFamily="34" charset="0"/>
-              </a:rPr>
-              <a:t>The model supports </a:t>
-            </a:r>
-            <a:r>
-              <a:rPr kumimoji="0" lang="en-US" altLang="en-US" sz="1800" b="1" i="0" u="none" strike="noStrike" cap="none" normalizeH="0" baseline="0" dirty="0">
-                <a:ln>
-                  <a:noFill/>
-                </a:ln>
-                <a:solidFill>
-                  <a:schemeClr val="tx1"/>
-                </a:solidFill>
-                <a:effectLst/>
-                <a:latin typeface="Arial" panose="020B0604020202020204" pitchFamily="34" charset="0"/>
-              </a:rPr>
-              <a:t>fast prediction, easy interpretability, and scalability</a:t>
-            </a:r>
-            <a:r>
-              <a:rPr kumimoji="0" lang="en-US" altLang="en-US" sz="1800" b="0" i="0" u="none" strike="noStrike" cap="none" normalizeH="0" baseline="0" dirty="0">
-                <a:ln>
-                  <a:noFill/>
-                </a:ln>
-                <a:solidFill>
-                  <a:schemeClr val="tx1"/>
-                </a:solidFill>
-                <a:effectLst/>
-                <a:latin typeface="Arial" panose="020B0604020202020204" pitchFamily="34" charset="0"/>
-              </a:rPr>
-              <a:t>, making it suitable for real-time web applications.</a:t>
-            </a:r>
-            <a:endParaRPr kumimoji="0" lang="en-US" altLang="en-US" sz="1800" b="0" i="0" u="none" strike="noStrike" cap="none" normalizeH="0" baseline="0" dirty="0">
-              <a:ln>
-                <a:noFill/>
-              </a:ln>
-              <a:solidFill>
-                <a:schemeClr val="tx1"/>
-              </a:solidFill>
-              <a:effectLst/>
-              <a:latin typeface="Arial" panose="020B0604020202020204" pitchFamily="34" charset="0"/>
-            </a:endParaRPr>
-          </a:p>
-        </p:txBody>
-      </p:sp>
-    </p:spTree>
-  </p:cSld>
-  <p:clrMapOvr>
-    <a:masterClrMapping/>
-  </p:clrMapOvr>
-</p:sld>
-</file>
-
-<file path=ppt/slides/slide7.xml><?xml version="1.0" encoding="utf-8"?>
+<file path=ppt/slides/slide12.xml><?xml version="1.0" encoding="utf-8"?>
 <p:sld xmlns:a="http://schemas.openxmlformats.org/drawingml/2006/main" xmlns:r="http://schemas.openxmlformats.org/officeDocument/2006/relationships" xmlns:p="http://schemas.openxmlformats.org/presentationml/2006/main">
   <p:cSld>
     <p:spTree>
@@ -5332,6 +4161,1248 @@
           </a:extLst>
         </p:spPr>
       </p:pic>
+    </p:spTree>
+  </p:cSld>
+  <p:clrMapOvr>
+    <a:masterClrMapping/>
+  </p:clrMapOvr>
+</p:sld>
+</file>
+
+<file path=ppt/slides/slide2.xml><?xml version="1.0" encoding="utf-8"?>
+<p:sld xmlns:a="http://schemas.openxmlformats.org/drawingml/2006/main" xmlns:r="http://schemas.openxmlformats.org/officeDocument/2006/relationships" xmlns:p="http://schemas.openxmlformats.org/presentationml/2006/main">
+  <p:cSld>
+    <p:spTree>
+      <p:nvGrpSpPr>
+        <p:cNvPr id="1" name=""/>
+        <p:cNvGrpSpPr/>
+        <p:nvPr/>
+      </p:nvGrpSpPr>
+      <p:grpSpPr/>
+      <p:sp>
+        <p:nvSpPr>
+          <p:cNvPr id="2" name="Title 1"/>
+          <p:cNvSpPr>
+            <a:spLocks noGrp="1"/>
+          </p:cNvSpPr>
+          <p:nvPr>
+            <p:ph type="title"/>
+          </p:nvPr>
+        </p:nvSpPr>
+        <p:spPr/>
+        <p:txBody>
+          <a:bodyPr/>
+          <a:p>
+            <a:r>
+              <a:rPr lang="en-GB" altLang="en-US"/>
+              <a:t>INTRODUCTION</a:t>
+            </a:r>
+            <a:endParaRPr lang="en-GB" altLang="en-US"/>
+          </a:p>
+        </p:txBody>
+      </p:sp>
+      <p:sp>
+        <p:nvSpPr>
+          <p:cNvPr id="3" name="Content Placeholder 2"/>
+          <p:cNvSpPr>
+            <a:spLocks noGrp="1"/>
+          </p:cNvSpPr>
+          <p:nvPr>
+            <p:ph idx="1"/>
+          </p:nvPr>
+        </p:nvSpPr>
+        <p:spPr/>
+        <p:txBody>
+          <a:bodyPr>
+            <a:normAutofit/>
+          </a:bodyPr>
+          <a:p>
+            <a:r>
+              <a:rPr lang="en-US" altLang="en-GB" sz="2000"/>
+              <a:t>Mental health issues such as stress, anxiety, and depression are increasingly common among students due to academic pressure, lifestyle changes, and social challenges. </a:t>
+            </a:r>
+            <a:endParaRPr lang="en-US" altLang="en-GB" sz="2000"/>
+          </a:p>
+          <a:p>
+            <a:r>
+              <a:rPr lang="en-US" altLang="en-GB" sz="2000"/>
+              <a:t>Many students hesitate to seek professional help because of stigma, lack of awareness, or limited access to mental health resources.</a:t>
+            </a:r>
+            <a:endParaRPr lang="en-US" altLang="en-GB" sz="2000"/>
+          </a:p>
+          <a:p>
+            <a:r>
+              <a:rPr lang="en-US" altLang="en-GB" sz="2000"/>
+              <a:t> With the advancement of artificial intelligence and machine learning, technology can play an important role in providing early mental health support.</a:t>
+            </a:r>
+            <a:endParaRPr lang="en-US" altLang="en-GB" sz="2000"/>
+          </a:p>
+          <a:p>
+            <a:r>
+              <a:rPr lang="en-US" altLang="en-GB" sz="2000"/>
+              <a:t> The proposed AI-Based Student Mental Health Support System aims to help students monitor their mental well-being through self-assessment questionnaires, machine learning prediction, and an AI chatbot.</a:t>
+            </a:r>
+            <a:endParaRPr lang="en-US" altLang="en-GB" sz="2000"/>
+          </a:p>
+          <a:p>
+            <a:r>
+              <a:rPr lang="en-US" altLang="en-GB" sz="2000"/>
+              <a:t> The system analyzes user responses to predict mental health risk levels and provides supportive guidance and wellness activities to promote emotional well-being.</a:t>
+            </a:r>
+            <a:endParaRPr lang="en-US" altLang="en-GB" sz="2000"/>
+          </a:p>
+        </p:txBody>
+      </p:sp>
+    </p:spTree>
+  </p:cSld>
+  <p:clrMapOvr>
+    <a:masterClrMapping/>
+  </p:clrMapOvr>
+</p:sld>
+</file>
+
+<file path=ppt/slides/slide3.xml><?xml version="1.0" encoding="utf-8"?>
+<p:sld xmlns:a="http://schemas.openxmlformats.org/drawingml/2006/main" xmlns:r="http://schemas.openxmlformats.org/officeDocument/2006/relationships" xmlns:p="http://schemas.openxmlformats.org/presentationml/2006/main">
+  <p:cSld>
+    <p:spTree>
+      <p:nvGrpSpPr>
+        <p:cNvPr id="1" name=""/>
+        <p:cNvGrpSpPr/>
+        <p:nvPr/>
+      </p:nvGrpSpPr>
+      <p:grpSpPr/>
+      <p:sp>
+        <p:nvSpPr>
+          <p:cNvPr id="2" name="Title 1"/>
+          <p:cNvSpPr>
+            <a:spLocks noGrp="1"/>
+          </p:cNvSpPr>
+          <p:nvPr>
+            <p:ph type="title"/>
+          </p:nvPr>
+        </p:nvSpPr>
+        <p:spPr/>
+        <p:txBody>
+          <a:bodyPr/>
+          <a:p>
+            <a:r>
+              <a:rPr lang="en-GB" altLang="en-US"/>
+              <a:t>PROBLEM STATEMENT</a:t>
+            </a:r>
+            <a:endParaRPr lang="en-GB" altLang="en-US"/>
+          </a:p>
+        </p:txBody>
+      </p:sp>
+      <p:sp>
+        <p:nvSpPr>
+          <p:cNvPr id="3" name="Content Placeholder 2"/>
+          <p:cNvSpPr>
+            <a:spLocks noGrp="1"/>
+          </p:cNvSpPr>
+          <p:nvPr>
+            <p:ph idx="1"/>
+          </p:nvPr>
+        </p:nvSpPr>
+        <p:spPr/>
+        <p:txBody>
+          <a:bodyPr>
+            <a:normAutofit fontScale="90000" lnSpcReduction="20000"/>
+          </a:bodyPr>
+          <a:p>
+            <a:r>
+              <a:rPr lang="en-US" dirty="0">
+                <a:sym typeface="+mn-ea"/>
+              </a:rPr>
+              <a:t>Many students struggle to recognize their mental health issues accurately, leading to delayed help-seeking or worsening stress.</a:t>
+            </a:r>
+            <a:endParaRPr lang="en-US" dirty="0"/>
+          </a:p>
+          <a:p>
+            <a:r>
+              <a:rPr lang="en-US" dirty="0">
+                <a:sym typeface="+mn-ea"/>
+              </a:rPr>
+              <a:t>Traditional counselling and mental health apps are often generic, culturally unsuitable, or difficult to access, which prevents students from getting timely support.</a:t>
+            </a:r>
+            <a:endParaRPr lang="en-US" dirty="0"/>
+          </a:p>
+          <a:p>
+            <a:r>
+              <a:rPr lang="en-US" dirty="0">
+                <a:sym typeface="+mn-ea"/>
+              </a:rPr>
+              <a:t>Counsellors face increasing workload, making it hard to provide immediate guidance for mild or early-stage mental health concerns.</a:t>
+            </a:r>
+            <a:endParaRPr lang="en-US" dirty="0"/>
+          </a:p>
+          <a:p>
+            <a:r>
+              <a:rPr lang="en-US" dirty="0">
+                <a:sym typeface="+mn-ea"/>
+              </a:rPr>
+              <a:t>There is a need for an automated, intelligent, and user-friendly system that can analyze student self-assessment data and provide quick, reliable mental health guidance.</a:t>
+            </a:r>
+            <a:endParaRPr lang="en-US" dirty="0"/>
+          </a:p>
+          <a:p>
+            <a:r>
+              <a:rPr lang="en-US" dirty="0">
+                <a:sym typeface="+mn-ea"/>
+              </a:rPr>
+              <a:t>The challenge lies in effectively interpreting text inputs from students using NLP and accurately predicting stress, anxiety, or depression levels using Machine Learning </a:t>
+            </a:r>
+            <a:r>
+              <a:rPr lang="en-US" dirty="0" err="1">
+                <a:sym typeface="+mn-ea"/>
+              </a:rPr>
+              <a:t>models.problem</a:t>
+            </a:r>
+            <a:r>
+              <a:rPr lang="en-US" dirty="0">
+                <a:sym typeface="+mn-ea"/>
+              </a:rPr>
+              <a:t> statement</a:t>
+            </a:r>
+            <a:endParaRPr lang="en-US" b="0" i="0" dirty="0">
+              <a:effectLst/>
+            </a:endParaRPr>
+          </a:p>
+          <a:p>
+            <a:endParaRPr lang="en-GB" altLang="en-US"/>
+          </a:p>
+        </p:txBody>
+      </p:sp>
+    </p:spTree>
+  </p:cSld>
+  <p:clrMapOvr>
+    <a:masterClrMapping/>
+  </p:clrMapOvr>
+</p:sld>
+</file>
+
+<file path=ppt/slides/slide4.xml><?xml version="1.0" encoding="utf-8"?>
+<p:sld xmlns:a="http://schemas.openxmlformats.org/drawingml/2006/main" xmlns:r="http://schemas.openxmlformats.org/officeDocument/2006/relationships" xmlns:p="http://schemas.openxmlformats.org/presentationml/2006/main">
+  <p:cSld>
+    <p:spTree>
+      <p:nvGrpSpPr>
+        <p:cNvPr id="1" name=""/>
+        <p:cNvGrpSpPr/>
+        <p:nvPr/>
+      </p:nvGrpSpPr>
+      <p:grpSpPr>
+        <a:xfrm>
+          <a:off x="0" y="0"/>
+          <a:ext cx="0" cy="0"/>
+          <a:chOff x="0" y="0"/>
+          <a:chExt cx="0" cy="0"/>
+        </a:xfrm>
+      </p:grpSpPr>
+      <p:sp>
+        <p:nvSpPr>
+          <p:cNvPr id="2" name="Title 1"/>
+          <p:cNvSpPr>
+            <a:spLocks noGrp="1"/>
+          </p:cNvSpPr>
+          <p:nvPr>
+            <p:ph type="title"/>
+          </p:nvPr>
+        </p:nvSpPr>
+        <p:spPr>
+          <a:xfrm>
+            <a:off x="838200" y="365125"/>
+            <a:ext cx="8950036" cy="1325563"/>
+          </a:xfrm>
+        </p:spPr>
+        <p:txBody>
+          <a:bodyPr/>
+          <a:lstStyle/>
+          <a:p>
+            <a:r>
+              <a:rPr lang="en-IN" dirty="0"/>
+              <a:t>PROJECT OBJECTIVES</a:t>
+            </a:r>
+            <a:endParaRPr lang="en-IN" dirty="0"/>
+          </a:p>
+        </p:txBody>
+      </p:sp>
+      <p:sp>
+        <p:nvSpPr>
+          <p:cNvPr id="3" name="Content Placeholder 2"/>
+          <p:cNvSpPr>
+            <a:spLocks noGrp="1"/>
+          </p:cNvSpPr>
+          <p:nvPr>
+            <p:ph idx="1"/>
+          </p:nvPr>
+        </p:nvSpPr>
+        <p:spPr/>
+        <p:txBody>
+          <a:bodyPr>
+            <a:noAutofit/>
+          </a:bodyPr>
+          <a:lstStyle/>
+          <a:p>
+            <a:r>
+              <a:rPr lang="en-US" sz="2000" dirty="0"/>
+              <a:t>The primary objective of this project is to design and develop a web-based system for assessing students’ mental health conditions using Machine Learning and Artificial Intelligence techniques.</a:t>
+            </a:r>
+            <a:endParaRPr lang="en-US" sz="2000" dirty="0"/>
+          </a:p>
+          <a:p>
+            <a:r>
+              <a:rPr lang="en-US" sz="2000" dirty="0"/>
+              <a:t>The system aims to collect self-assessment data securely and analyze it using a Logistic Regression model to accurately identify stress, anxiety, and depression levels. </a:t>
+            </a:r>
+            <a:endParaRPr lang="en-US" sz="2000" dirty="0"/>
+          </a:p>
+          <a:p>
+            <a:r>
+              <a:rPr lang="en-US" sz="2000" dirty="0"/>
+              <a:t>Another objective is to integrate an AI chatbot based on Natural Language Processing to enable interactive communication and provide basic guidance to students.</a:t>
+            </a:r>
+            <a:endParaRPr lang="en-US" sz="2000" dirty="0"/>
+          </a:p>
+          <a:p>
+            <a:r>
+              <a:rPr lang="en-US" sz="2000" dirty="0"/>
+              <a:t>The project also focuses on ensuring user privacy and anonymity to encourage honest participation.</a:t>
+            </a:r>
+            <a:endParaRPr lang="en-US" sz="2000" dirty="0"/>
+          </a:p>
+          <a:p>
+            <a:r>
+              <a:rPr lang="en-US" sz="2000" dirty="0"/>
+              <a:t>Additionally, the system seeks to support early detection of mental health issues, reduce the manual workload of counselors through automated screening, and provide a scalable solution that can be enhanced with advanced models and features in the future.</a:t>
+            </a:r>
+            <a:endParaRPr lang="en-US" sz="2000" dirty="0"/>
+          </a:p>
+        </p:txBody>
+      </p:sp>
+      <p:pic>
+        <p:nvPicPr>
+          <p:cNvPr id="4" name="Picture 3"/>
+          <p:cNvPicPr>
+            <a:picLocks noChangeAspect="1"/>
+          </p:cNvPicPr>
+          <p:nvPr/>
+        </p:nvPicPr>
+        <p:blipFill rotWithShape="1">
+          <a:blip r:embed="rId1"/>
+          <a:srcRect r="5721" b="8394"/>
+          <a:stretch>
+            <a:fillRect/>
+          </a:stretch>
+        </p:blipFill>
+        <p:spPr>
+          <a:xfrm>
+            <a:off x="10471514" y="365124"/>
+            <a:ext cx="1433006" cy="1325563"/>
+          </a:xfrm>
+          <a:prstGeom prst="rect">
+            <a:avLst/>
+          </a:prstGeom>
+        </p:spPr>
+      </p:pic>
+    </p:spTree>
+  </p:cSld>
+  <p:clrMapOvr>
+    <a:masterClrMapping/>
+  </p:clrMapOvr>
+</p:sld>
+</file>
+
+<file path=ppt/slides/slide5.xml><?xml version="1.0" encoding="utf-8"?>
+<p:sld xmlns:a="http://schemas.openxmlformats.org/drawingml/2006/main" xmlns:r="http://schemas.openxmlformats.org/officeDocument/2006/relationships" xmlns:p="http://schemas.openxmlformats.org/presentationml/2006/main">
+  <p:cSld>
+    <p:spTree>
+      <p:nvGrpSpPr>
+        <p:cNvPr id="1" name=""/>
+        <p:cNvGrpSpPr/>
+        <p:nvPr/>
+      </p:nvGrpSpPr>
+      <p:grpSpPr/>
+      <p:sp>
+        <p:nvSpPr>
+          <p:cNvPr id="2" name="Title 1"/>
+          <p:cNvSpPr>
+            <a:spLocks noGrp="1"/>
+          </p:cNvSpPr>
+          <p:nvPr>
+            <p:ph type="title"/>
+          </p:nvPr>
+        </p:nvSpPr>
+        <p:spPr/>
+        <p:txBody>
+          <a:bodyPr/>
+          <a:p>
+            <a:r>
+              <a:rPr lang="en-GB" altLang="en-US"/>
+              <a:t>LITERATURE REVIEW</a:t>
+            </a:r>
+            <a:endParaRPr lang="en-GB" altLang="en-US"/>
+          </a:p>
+        </p:txBody>
+      </p:sp>
+      <p:sp>
+        <p:nvSpPr>
+          <p:cNvPr id="3" name="Content Placeholder 2"/>
+          <p:cNvSpPr>
+            <a:spLocks noGrp="1"/>
+          </p:cNvSpPr>
+          <p:nvPr>
+            <p:ph idx="1"/>
+          </p:nvPr>
+        </p:nvSpPr>
+        <p:spPr/>
+        <p:txBody>
+          <a:bodyPr>
+            <a:normAutofit/>
+          </a:bodyPr>
+          <a:p>
+            <a:r>
+              <a:rPr lang="en-US" altLang="en-GB" sz="2000" b="0" i="0" dirty="0">
+                <a:effectLst/>
+              </a:rPr>
+              <a:t>Researchers have used machine learning algorithms such as logistic regression and decision trees to predict mental health conditions like stress and depression from questionnaire data.</a:t>
+            </a:r>
+            <a:endParaRPr lang="en-US" altLang="en-GB" sz="2000" b="0" i="0" dirty="0">
+              <a:effectLst/>
+            </a:endParaRPr>
+          </a:p>
+          <a:p>
+            <a:r>
+              <a:rPr lang="en-US" altLang="en-GB" sz="2000" b="0" i="0" dirty="0">
+                <a:effectLst/>
+              </a:rPr>
+              <a:t>Natural Language Processing (NLP) techniques are used to analyze user text and detect emotions through sentiment analysis.</a:t>
+            </a:r>
+            <a:endParaRPr lang="en-US" altLang="en-GB" sz="2000" b="0" i="0" dirty="0">
+              <a:effectLst/>
+            </a:endParaRPr>
+          </a:p>
+          <a:p>
+            <a:r>
+              <a:rPr lang="en-US" altLang="en-GB" sz="2000" b="0" i="0" dirty="0">
+                <a:effectLst/>
+              </a:rPr>
+              <a:t>AI chatbots are widely used in mental health applications to provide basic emotional support and guidance through conversations.</a:t>
+            </a:r>
+            <a:endParaRPr lang="en-US" altLang="en-GB" sz="2000" b="0" i="0" dirty="0">
+              <a:effectLst/>
+            </a:endParaRPr>
+          </a:p>
+          <a:p>
+            <a:r>
+              <a:rPr lang="en-US" altLang="en-GB" sz="2000" b="0" i="0" dirty="0">
+                <a:effectLst/>
+              </a:rPr>
+              <a:t>Many systems include self-assessment questionnaires and wellness activities to help users monitor and improve their mental well-being.</a:t>
+            </a:r>
+            <a:endParaRPr lang="en-US" altLang="en-GB" sz="2000" b="0" i="0" dirty="0">
+              <a:effectLst/>
+            </a:endParaRPr>
+          </a:p>
+          <a:p>
+            <a:pPr marL="0" indent="0">
+              <a:buNone/>
+            </a:pPr>
+            <a:r>
+              <a:rPr lang="en-US" altLang="en-GB" sz="2000" b="1" dirty="0">
+                <a:effectLst/>
+                <a:sym typeface="+mn-ea"/>
+              </a:rPr>
+              <a:t>Limitations: </a:t>
+            </a:r>
+            <a:r>
+              <a:rPr lang="en-US" altLang="en-GB" sz="2000" dirty="0">
+                <a:effectLst/>
+                <a:sym typeface="+mn-ea"/>
+              </a:rPr>
+              <a:t>Generic advice, no personalization, reactive, and limited emotion understanding.</a:t>
+            </a:r>
+            <a:endParaRPr lang="en-US" altLang="en-GB" sz="2000" b="0" i="0" dirty="0">
+              <a:effectLst/>
+            </a:endParaRPr>
+          </a:p>
+          <a:p>
+            <a:endParaRPr lang="en-GB" altLang="en-US" sz="2000"/>
+          </a:p>
+        </p:txBody>
+      </p:sp>
+    </p:spTree>
+  </p:cSld>
+  <p:clrMapOvr>
+    <a:masterClrMapping/>
+  </p:clrMapOvr>
+</p:sld>
+</file>
+
+<file path=ppt/slides/slide6.xml><?xml version="1.0" encoding="utf-8"?>
+<p:sld xmlns:a="http://schemas.openxmlformats.org/drawingml/2006/main" xmlns:r="http://schemas.openxmlformats.org/officeDocument/2006/relationships" xmlns:p="http://schemas.openxmlformats.org/presentationml/2006/main">
+  <p:cSld>
+    <p:spTree>
+      <p:nvGrpSpPr>
+        <p:cNvPr id="1" name=""/>
+        <p:cNvGrpSpPr/>
+        <p:nvPr/>
+      </p:nvGrpSpPr>
+      <p:grpSpPr>
+        <a:xfrm>
+          <a:off x="0" y="0"/>
+          <a:ext cx="0" cy="0"/>
+          <a:chOff x="0" y="0"/>
+          <a:chExt cx="0" cy="0"/>
+        </a:xfrm>
+      </p:grpSpPr>
+      <p:sp>
+        <p:nvSpPr>
+          <p:cNvPr id="2" name="Title 1"/>
+          <p:cNvSpPr>
+            <a:spLocks noGrp="1"/>
+          </p:cNvSpPr>
+          <p:nvPr>
+            <p:ph type="title"/>
+          </p:nvPr>
+        </p:nvSpPr>
+        <p:spPr>
+          <a:xfrm>
+            <a:off x="838200" y="365125"/>
+            <a:ext cx="8950036" cy="1325563"/>
+          </a:xfrm>
+        </p:spPr>
+        <p:txBody>
+          <a:bodyPr/>
+          <a:lstStyle/>
+          <a:p>
+            <a:r>
+              <a:rPr lang="en-GB" altLang="en-IN" dirty="0"/>
+              <a:t>METHODOLGY</a:t>
+            </a:r>
+            <a:endParaRPr lang="en-GB" altLang="en-IN" dirty="0"/>
+          </a:p>
+        </p:txBody>
+      </p:sp>
+      <p:sp>
+        <p:nvSpPr>
+          <p:cNvPr id="3" name="Content Placeholder 2"/>
+          <p:cNvSpPr>
+            <a:spLocks noGrp="1"/>
+          </p:cNvSpPr>
+          <p:nvPr>
+            <p:ph idx="1"/>
+          </p:nvPr>
+        </p:nvSpPr>
+        <p:spPr/>
+        <p:txBody>
+          <a:bodyPr>
+            <a:noAutofit/>
+          </a:bodyPr>
+          <a:lstStyle/>
+          <a:p>
+            <a:r>
+              <a:rPr lang="en-US" altLang="en-GB" sz="1900" b="0" i="0" dirty="0">
+                <a:effectLst/>
+              </a:rPr>
+              <a:t>Data Collection: Users provide input by answering mental health self-assessment questionnaires and interacting with the chatbot through the web interface.</a:t>
+            </a:r>
+            <a:endParaRPr lang="en-US" altLang="en-GB" sz="1900" b="0" i="0" dirty="0">
+              <a:effectLst/>
+            </a:endParaRPr>
+          </a:p>
+          <a:p>
+            <a:r>
+              <a:rPr lang="en-US" altLang="en-GB" sz="1900" b="0" i="0" dirty="0">
+                <a:effectLst/>
+              </a:rPr>
+              <a:t>Data Preprocessing: The collected questionnaire data is cleaned, organized, and converted into a suitable format for machine learning analysis.</a:t>
+            </a:r>
+            <a:endParaRPr lang="en-US" altLang="en-GB" sz="1900" b="0" i="0" dirty="0">
+              <a:effectLst/>
+            </a:endParaRPr>
+          </a:p>
+          <a:p>
+            <a:r>
+              <a:rPr lang="en-US" altLang="en-GB" sz="1900" b="0" i="0" dirty="0">
+                <a:effectLst/>
+              </a:rPr>
+              <a:t>Machine Learning Model: A Logistic Regression model is used to analyze the processed data and predict the user’s mental health risk level (low, moderate, or high).</a:t>
+            </a:r>
+            <a:endParaRPr lang="en-US" altLang="en-GB" sz="1900" b="0" i="0" dirty="0">
+              <a:effectLst/>
+            </a:endParaRPr>
+          </a:p>
+          <a:p>
+            <a:r>
+              <a:rPr lang="en-US" altLang="en-GB" sz="1900" b="0" i="0" dirty="0">
+                <a:effectLst/>
+              </a:rPr>
+              <a:t>Chatbot Processing: User messages are analyzed using Natural Language Processing (NLP) techniques to detect emotions and provide supportive responses.</a:t>
+            </a:r>
+            <a:endParaRPr lang="en-US" altLang="en-GB" sz="1900" b="0" i="0" dirty="0">
+              <a:effectLst/>
+            </a:endParaRPr>
+          </a:p>
+          <a:p>
+            <a:r>
+              <a:rPr lang="en-US" altLang="en-GB" sz="1900" b="0" i="0" dirty="0">
+                <a:effectLst/>
+              </a:rPr>
+              <a:t>Result Generation: The system generates prediction results and personalized feedback based on the analysis.</a:t>
+            </a:r>
+            <a:endParaRPr lang="en-US" altLang="en-GB" sz="1900" b="0" i="0" dirty="0">
+              <a:effectLst/>
+            </a:endParaRPr>
+          </a:p>
+          <a:p>
+            <a:r>
+              <a:rPr lang="en-US" altLang="en-GB" sz="1900" b="0" i="0" dirty="0">
+                <a:effectLst/>
+              </a:rPr>
+              <a:t>Dat</a:t>
+            </a:r>
+            <a:r>
+              <a:rPr lang="en-GB" altLang="en-US" sz="1900" b="0" i="0" dirty="0">
+                <a:effectLst/>
+              </a:rPr>
+              <a:t>a</a:t>
+            </a:r>
+            <a:r>
+              <a:rPr lang="en-US" altLang="en-GB" sz="1900" b="0" i="0" dirty="0">
+                <a:effectLst/>
+              </a:rPr>
+              <a:t> Storage: All user data, predictions, and chatbot conversations are securely stored in a database for future reference and monitoring.</a:t>
+            </a:r>
+            <a:r>
+              <a:rPr lang="en-GB" altLang="en-US" sz="1900" b="0" i="0" dirty="0">
+                <a:effectLst/>
+              </a:rPr>
+              <a:t>	</a:t>
+            </a:r>
+            <a:endParaRPr lang="en-GB" altLang="en-US" sz="1900" b="0" i="0" dirty="0">
+              <a:effectLst/>
+            </a:endParaRPr>
+          </a:p>
+        </p:txBody>
+      </p:sp>
+      <p:pic>
+        <p:nvPicPr>
+          <p:cNvPr id="4" name="Picture 3"/>
+          <p:cNvPicPr>
+            <a:picLocks noChangeAspect="1"/>
+          </p:cNvPicPr>
+          <p:nvPr/>
+        </p:nvPicPr>
+        <p:blipFill rotWithShape="1">
+          <a:blip r:embed="rId1"/>
+          <a:srcRect r="5721" b="8394"/>
+          <a:stretch>
+            <a:fillRect/>
+          </a:stretch>
+        </p:blipFill>
+        <p:spPr>
+          <a:xfrm>
+            <a:off x="10471514" y="365124"/>
+            <a:ext cx="1433006" cy="1325563"/>
+          </a:xfrm>
+          <a:prstGeom prst="rect">
+            <a:avLst/>
+          </a:prstGeom>
+        </p:spPr>
+      </p:pic>
+    </p:spTree>
+  </p:cSld>
+  <p:clrMapOvr>
+    <a:masterClrMapping/>
+  </p:clrMapOvr>
+</p:sld>
+</file>
+
+<file path=ppt/slides/slide7.xml><?xml version="1.0" encoding="utf-8"?>
+<p:sld xmlns:a="http://schemas.openxmlformats.org/drawingml/2006/main" xmlns:r="http://schemas.openxmlformats.org/officeDocument/2006/relationships" xmlns:p="http://schemas.openxmlformats.org/presentationml/2006/main">
+  <p:cSld>
+    <p:spTree>
+      <p:nvGrpSpPr>
+        <p:cNvPr id="1" name=""/>
+        <p:cNvGrpSpPr/>
+        <p:nvPr/>
+      </p:nvGrpSpPr>
+      <p:grpSpPr/>
+      <p:sp>
+        <p:nvSpPr>
+          <p:cNvPr id="2" name="Title 1"/>
+          <p:cNvSpPr>
+            <a:spLocks noGrp="1"/>
+          </p:cNvSpPr>
+          <p:nvPr>
+            <p:ph type="title"/>
+          </p:nvPr>
+        </p:nvSpPr>
+        <p:spPr/>
+        <p:txBody>
+          <a:bodyPr/>
+          <a:p>
+            <a:r>
+              <a:rPr lang="en-GB" altLang="en-US"/>
+              <a:t>IMPLEMENTATION</a:t>
+            </a:r>
+            <a:endParaRPr lang="en-GB" altLang="en-US"/>
+          </a:p>
+        </p:txBody>
+      </p:sp>
+      <p:sp>
+        <p:nvSpPr>
+          <p:cNvPr id="3" name="Content Placeholder 2"/>
+          <p:cNvSpPr>
+            <a:spLocks noGrp="1"/>
+          </p:cNvSpPr>
+          <p:nvPr>
+            <p:ph idx="1"/>
+          </p:nvPr>
+        </p:nvSpPr>
+        <p:spPr/>
+        <p:txBody>
+          <a:bodyPr>
+            <a:noAutofit/>
+          </a:bodyPr>
+          <a:p>
+            <a:r>
+              <a:rPr lang="en-US" altLang="en-GB" sz="1900"/>
+              <a:t>Frontend Development: The user interface was developed using HTML, CSS, and JavaScript to provide an interactive platform where users can complete questionnaires, interact with the chatbot, and view results.</a:t>
+            </a:r>
+            <a:endParaRPr lang="en-US" altLang="en-GB" sz="1900"/>
+          </a:p>
+          <a:p>
+            <a:r>
+              <a:rPr lang="en-US" altLang="en-GB" sz="1900"/>
+              <a:t>Backend Development: The backend was implemented using the Django framework in Python to handle user requests, process data, and manage communication between different modules.</a:t>
+            </a:r>
+            <a:endParaRPr lang="en-US" altLang="en-GB" sz="1900"/>
+          </a:p>
+          <a:p>
+            <a:r>
+              <a:rPr lang="en-US" altLang="en-GB" sz="1900"/>
+              <a:t>Machine Learning Integration: A Logistic Regression model was integrated into the backend to analyze questionnaire responses and predict the mental health risk level of users.</a:t>
+            </a:r>
+            <a:endParaRPr lang="en-US" altLang="en-GB" sz="1900"/>
+          </a:p>
+          <a:p>
+            <a:r>
+              <a:rPr lang="en-US" altLang="en-GB" sz="1900"/>
+              <a:t>Chatbot Integration: A rule-based and NLP-supported chatbot was implemented to analyze user messages and provide supportive responses based on detected emotions.</a:t>
+            </a:r>
+            <a:endParaRPr lang="en-US" altLang="en-GB" sz="1900"/>
+          </a:p>
+          <a:p>
+            <a:r>
+              <a:rPr lang="en-US" altLang="en-GB" sz="1900"/>
+              <a:t>Database Management: A database was used to store user information, questionnaire responses, prediction results, and chatbot conversation history securely.</a:t>
+            </a:r>
+            <a:endParaRPr lang="en-US" altLang="en-GB" sz="1900"/>
+          </a:p>
+          <a:p>
+            <a:r>
+              <a:rPr lang="en-US" altLang="en-GB" sz="1900"/>
+              <a:t>API Communication: HTTP and API requests were used to enable smooth data exchange between the frontend interface and backend processing modules.</a:t>
+            </a:r>
+            <a:endParaRPr lang="en-US" altLang="en-GB" sz="1900"/>
+          </a:p>
+        </p:txBody>
+      </p:sp>
+    </p:spTree>
+  </p:cSld>
+  <p:clrMapOvr>
+    <a:masterClrMapping/>
+  </p:clrMapOvr>
+</p:sld>
+</file>
+
+<file path=ppt/slides/slide8.xml><?xml version="1.0" encoding="utf-8"?>
+<p:sld xmlns:a="http://schemas.openxmlformats.org/drawingml/2006/main" xmlns:r="http://schemas.openxmlformats.org/officeDocument/2006/relationships" xmlns:p="http://schemas.openxmlformats.org/presentationml/2006/main">
+  <p:cSld>
+    <p:spTree>
+      <p:nvGrpSpPr>
+        <p:cNvPr id="1" name=""/>
+        <p:cNvGrpSpPr/>
+        <p:nvPr/>
+      </p:nvGrpSpPr>
+      <p:grpSpPr>
+        <a:xfrm>
+          <a:off x="0" y="0"/>
+          <a:ext cx="0" cy="0"/>
+          <a:chOff x="0" y="0"/>
+          <a:chExt cx="0" cy="0"/>
+        </a:xfrm>
+      </p:grpSpPr>
+      <p:sp>
+        <p:nvSpPr>
+          <p:cNvPr id="2" name="Title 1"/>
+          <p:cNvSpPr>
+            <a:spLocks noGrp="1"/>
+          </p:cNvSpPr>
+          <p:nvPr>
+            <p:ph type="title"/>
+          </p:nvPr>
+        </p:nvSpPr>
+        <p:spPr>
+          <a:xfrm>
+            <a:off x="838200" y="365125"/>
+            <a:ext cx="8950325" cy="1063625"/>
+          </a:xfrm>
+        </p:spPr>
+        <p:txBody>
+          <a:bodyPr/>
+          <a:lstStyle/>
+          <a:p>
+            <a:r>
+              <a:rPr lang="en-GB" altLang="en-IN" dirty="0"/>
+              <a:t>ARCHITECTURE </a:t>
+            </a:r>
+            <a:r>
+              <a:rPr lang="en-IN" dirty="0"/>
+              <a:t> DIAGRAM</a:t>
+            </a:r>
+            <a:endParaRPr lang="en-IN" dirty="0"/>
+          </a:p>
+        </p:txBody>
+      </p:sp>
+      <p:pic>
+        <p:nvPicPr>
+          <p:cNvPr id="4" name="Picture 3"/>
+          <p:cNvPicPr>
+            <a:picLocks noChangeAspect="1"/>
+          </p:cNvPicPr>
+          <p:nvPr/>
+        </p:nvPicPr>
+        <p:blipFill rotWithShape="1">
+          <a:blip r:embed="rId1"/>
+          <a:srcRect r="5721" b="8394"/>
+          <a:stretch>
+            <a:fillRect/>
+          </a:stretch>
+        </p:blipFill>
+        <p:spPr>
+          <a:xfrm>
+            <a:off x="10471514" y="365124"/>
+            <a:ext cx="1433006" cy="1325563"/>
+          </a:xfrm>
+          <a:prstGeom prst="rect">
+            <a:avLst/>
+          </a:prstGeom>
+        </p:spPr>
+      </p:pic>
+      <p:pic>
+        <p:nvPicPr>
+          <p:cNvPr id="3" name="Picture 2"/>
+          <p:cNvPicPr>
+            <a:picLocks noChangeAspect="1"/>
+          </p:cNvPicPr>
+          <p:nvPr/>
+        </p:nvPicPr>
+        <p:blipFill>
+          <a:blip r:embed="rId2"/>
+          <a:stretch>
+            <a:fillRect/>
+          </a:stretch>
+        </p:blipFill>
+        <p:spPr>
+          <a:xfrm>
+            <a:off x="2908300" y="1739900"/>
+            <a:ext cx="6375400" cy="3378200"/>
+          </a:xfrm>
+          <a:prstGeom prst="rect">
+            <a:avLst/>
+          </a:prstGeom>
+        </p:spPr>
+      </p:pic>
+    </p:spTree>
+  </p:cSld>
+  <p:clrMapOvr>
+    <a:masterClrMapping/>
+  </p:clrMapOvr>
+</p:sld>
+</file>
+
+<file path=ppt/slides/slide9.xml><?xml version="1.0" encoding="utf-8"?>
+<p:sld xmlns:a="http://schemas.openxmlformats.org/drawingml/2006/main" xmlns:r="http://schemas.openxmlformats.org/officeDocument/2006/relationships" xmlns:p="http://schemas.openxmlformats.org/presentationml/2006/main">
+  <p:cSld>
+    <p:spTree>
+      <p:nvGrpSpPr>
+        <p:cNvPr id="1" name=""/>
+        <p:cNvGrpSpPr/>
+        <p:nvPr/>
+      </p:nvGrpSpPr>
+      <p:grpSpPr>
+        <a:xfrm>
+          <a:off x="0" y="0"/>
+          <a:ext cx="0" cy="0"/>
+          <a:chOff x="0" y="0"/>
+          <a:chExt cx="0" cy="0"/>
+        </a:xfrm>
+      </p:grpSpPr>
+      <p:sp>
+        <p:nvSpPr>
+          <p:cNvPr id="2" name="Title 1"/>
+          <p:cNvSpPr>
+            <a:spLocks noGrp="1"/>
+          </p:cNvSpPr>
+          <p:nvPr>
+            <p:ph type="title"/>
+          </p:nvPr>
+        </p:nvSpPr>
+        <p:spPr>
+          <a:xfrm>
+            <a:off x="838200" y="365125"/>
+            <a:ext cx="8950036" cy="1325563"/>
+          </a:xfrm>
+        </p:spPr>
+        <p:txBody>
+          <a:bodyPr/>
+          <a:lstStyle/>
+          <a:p>
+            <a:r>
+              <a:rPr lang="en-GB" altLang="en-IN" dirty="0"/>
+              <a:t>RESULTs &amp; ANALYSIS</a:t>
+            </a:r>
+            <a:endParaRPr lang="en-GB" altLang="en-IN" dirty="0"/>
+          </a:p>
+        </p:txBody>
+      </p:sp>
+      <p:pic>
+        <p:nvPicPr>
+          <p:cNvPr id="4" name="Picture 3"/>
+          <p:cNvPicPr>
+            <a:picLocks noChangeAspect="1"/>
+          </p:cNvPicPr>
+          <p:nvPr/>
+        </p:nvPicPr>
+        <p:blipFill rotWithShape="1">
+          <a:blip r:embed="rId1"/>
+          <a:srcRect r="5721" b="8394"/>
+          <a:stretch>
+            <a:fillRect/>
+          </a:stretch>
+        </p:blipFill>
+        <p:spPr>
+          <a:xfrm>
+            <a:off x="10471514" y="365124"/>
+            <a:ext cx="1433006" cy="1325563"/>
+          </a:xfrm>
+          <a:prstGeom prst="rect">
+            <a:avLst/>
+          </a:prstGeom>
+        </p:spPr>
+      </p:pic>
+      <p:sp>
+        <p:nvSpPr>
+          <p:cNvPr id="9" name="Rectangle 4"/>
+          <p:cNvSpPr>
+            <a:spLocks noGrp="1" noChangeArrowheads="1"/>
+          </p:cNvSpPr>
+          <p:nvPr>
+            <p:ph idx="1"/>
+          </p:nvPr>
+        </p:nvSpPr>
+        <p:spPr bwMode="auto">
+          <a:xfrm>
+            <a:off x="838200" y="1464310"/>
+            <a:ext cx="10411460" cy="4999355"/>
+          </a:xfrm>
+          <a:prstGeom prst="rect">
+            <a:avLst/>
+          </a:prstGeom>
+          <a:noFill/>
+          <a:ln>
+            <a:noFill/>
+          </a:ln>
+          <a:effectLst/>
+          <a:extLst>
+            <a:ext uri="{909E8E84-426E-40DD-AFC4-6F175D3DCCD1}">
+              <a14:hiddenFill xmlns:a14="http://schemas.microsoft.com/office/drawing/2010/main">
+                <a:solidFill>
+                  <a:schemeClr val="accent1"/>
+                </a:solidFill>
+              </a14:hiddenFill>
+            </a:ext>
+            <a:ext uri="{91240B29-F687-4F45-9708-019B960494DF}">
+              <a14:hiddenLine xmlns:a14="http://schemas.microsoft.com/office/drawing/2010/main" w="9525">
+                <a:solidFill>
+                  <a:schemeClr val="tx1"/>
+                </a:solidFill>
+                <a:miter lim="800000"/>
+                <a:headEnd/>
+                <a:tailEnd/>
+              </a14:hiddenLine>
+            </a:ext>
+            <a:ext uri="{AF507438-7753-43E0-B8FC-AC1667EBCBE1}">
+              <a14:hiddenEffects xmlns:a14="http://schemas.microsoft.com/office/drawing/2010/main">
+                <a:effectLst>
+                  <a:outerShdw dist="35921" dir="2700000" algn="ctr" rotWithShape="0">
+                    <a:schemeClr val="bg2"/>
+                  </a:outerShdw>
+                </a:effectLst>
+              </a14:hiddenEffects>
+            </a:ext>
+          </a:extLst>
+        </p:spPr>
+        <p:txBody>
+          <a:bodyPr vert="horz" wrap="square" lIns="91440" tIns="45720" rIns="91440" bIns="45720" numCol="1" anchor="ctr" anchorCtr="0" compatLnSpc="1">
+            <a:noAutofit/>
+          </a:bodyPr>
+          <a:lstStyle/>
+          <a:p>
+            <a:pPr eaLnBrk="0" fontAlgn="base" hangingPunct="0">
+              <a:lnSpc>
+                <a:spcPct val="100000"/>
+              </a:lnSpc>
+              <a:spcBef>
+                <a:spcPct val="0"/>
+              </a:spcBef>
+              <a:spcAft>
+                <a:spcPct val="0"/>
+              </a:spcAft>
+            </a:pPr>
+            <a:r>
+              <a:rPr kumimoji="0" lang="en-US" altLang="en-GB" sz="2000" b="0" i="0" u="none" strike="noStrike" cap="none" normalizeH="0" baseline="0" dirty="0">
+                <a:ln>
+                  <a:noFill/>
+                </a:ln>
+                <a:solidFill>
+                  <a:schemeClr val="tx1"/>
+                </a:solidFill>
+                <a:effectLst/>
+                <a:latin typeface="Arial" panose="020B0604020202020204" pitchFamily="34" charset="0"/>
+              </a:rPr>
+              <a:t>The system was tested using sample questionnaire responses and chatbot interactions.</a:t>
+            </a:r>
+            <a:endParaRPr kumimoji="0" lang="en-US" altLang="en-GB" sz="2000" b="0" i="0" u="none" strike="noStrike" cap="none" normalizeH="0" baseline="0" dirty="0">
+              <a:ln>
+                <a:noFill/>
+              </a:ln>
+              <a:solidFill>
+                <a:schemeClr val="tx1"/>
+              </a:solidFill>
+              <a:effectLst/>
+              <a:latin typeface="Arial" panose="020B0604020202020204" pitchFamily="34" charset="0"/>
+            </a:endParaRPr>
+          </a:p>
+          <a:p>
+            <a:pPr eaLnBrk="0" fontAlgn="base" hangingPunct="0">
+              <a:lnSpc>
+                <a:spcPct val="100000"/>
+              </a:lnSpc>
+              <a:spcBef>
+                <a:spcPct val="0"/>
+              </a:spcBef>
+              <a:spcAft>
+                <a:spcPct val="0"/>
+              </a:spcAft>
+            </a:pPr>
+            <a:r>
+              <a:rPr kumimoji="0" lang="en-US" altLang="en-GB" sz="2000" b="0" i="0" u="none" strike="noStrike" cap="none" normalizeH="0" baseline="0" dirty="0">
+                <a:ln>
+                  <a:noFill/>
+                </a:ln>
+                <a:solidFill>
+                  <a:schemeClr val="tx1"/>
+                </a:solidFill>
+                <a:effectLst/>
+                <a:latin typeface="Arial" panose="020B0604020202020204" pitchFamily="34" charset="0"/>
+              </a:rPr>
+              <a:t> The Logistic Regression model successfully predicted mental health risk levels such as low, moderate, and high.</a:t>
+            </a:r>
+            <a:endParaRPr kumimoji="0" lang="en-US" altLang="en-GB" sz="2000" b="0" i="0" u="none" strike="noStrike" cap="none" normalizeH="0" baseline="0" dirty="0">
+              <a:ln>
+                <a:noFill/>
+              </a:ln>
+              <a:solidFill>
+                <a:schemeClr val="tx1"/>
+              </a:solidFill>
+              <a:effectLst/>
+              <a:latin typeface="Arial" panose="020B0604020202020204" pitchFamily="34" charset="0"/>
+            </a:endParaRPr>
+          </a:p>
+          <a:p>
+            <a:pPr eaLnBrk="0" fontAlgn="base" hangingPunct="0">
+              <a:lnSpc>
+                <a:spcPct val="100000"/>
+              </a:lnSpc>
+              <a:spcBef>
+                <a:spcPct val="0"/>
+              </a:spcBef>
+              <a:spcAft>
+                <a:spcPct val="0"/>
+              </a:spcAft>
+            </a:pPr>
+            <a:r>
+              <a:rPr kumimoji="0" lang="en-US" altLang="en-GB" sz="2000" b="0" i="0" u="none" strike="noStrike" cap="none" normalizeH="0" baseline="0" dirty="0">
+                <a:ln>
+                  <a:noFill/>
+                </a:ln>
+                <a:solidFill>
+                  <a:schemeClr val="tx1"/>
+                </a:solidFill>
+                <a:effectLst/>
+                <a:latin typeface="Arial" panose="020B0604020202020204" pitchFamily="34" charset="0"/>
+              </a:rPr>
+              <a:t> The chatbot analyzed user messages and provided supportive responses. </a:t>
+            </a:r>
+            <a:endParaRPr kumimoji="0" lang="en-US" altLang="en-GB" sz="2000" b="0" i="0" u="none" strike="noStrike" cap="none" normalizeH="0" baseline="0" dirty="0">
+              <a:ln>
+                <a:noFill/>
+              </a:ln>
+              <a:solidFill>
+                <a:schemeClr val="tx1"/>
+              </a:solidFill>
+              <a:effectLst/>
+              <a:latin typeface="Arial" panose="020B0604020202020204" pitchFamily="34" charset="0"/>
+            </a:endParaRPr>
+          </a:p>
+          <a:p>
+            <a:pPr eaLnBrk="0" fontAlgn="base" hangingPunct="0">
+              <a:lnSpc>
+                <a:spcPct val="100000"/>
+              </a:lnSpc>
+              <a:spcBef>
+                <a:spcPct val="0"/>
+              </a:spcBef>
+              <a:spcAft>
+                <a:spcPct val="0"/>
+              </a:spcAft>
+            </a:pPr>
+            <a:r>
+              <a:rPr kumimoji="0" lang="en-US" altLang="en-GB" sz="2000" b="0" i="0" u="none" strike="noStrike" cap="none" normalizeH="0" baseline="0" dirty="0">
+                <a:ln>
+                  <a:noFill/>
+                </a:ln>
+                <a:solidFill>
+                  <a:schemeClr val="tx1"/>
+                </a:solidFill>
+                <a:effectLst/>
+                <a:latin typeface="Arial" panose="020B0604020202020204" pitchFamily="34" charset="0"/>
+              </a:rPr>
+              <a:t>In addition, the system includes relaxation exercises and simple games to help reduce stress and improve user engagement.</a:t>
+            </a:r>
+            <a:endParaRPr kumimoji="0" lang="en-US" altLang="en-GB" sz="2000" b="0" i="0" u="none" strike="noStrike" cap="none" normalizeH="0" baseline="0" dirty="0">
+              <a:ln>
+                <a:noFill/>
+              </a:ln>
+              <a:solidFill>
+                <a:schemeClr val="tx1"/>
+              </a:solidFill>
+              <a:effectLst/>
+              <a:latin typeface="Arial" panose="020B0604020202020204" pitchFamily="34" charset="0"/>
+            </a:endParaRPr>
+          </a:p>
+          <a:p>
+            <a:pPr eaLnBrk="0" fontAlgn="base" hangingPunct="0">
+              <a:lnSpc>
+                <a:spcPct val="100000"/>
+              </a:lnSpc>
+              <a:spcBef>
+                <a:spcPct val="0"/>
+              </a:spcBef>
+              <a:spcAft>
+                <a:spcPct val="0"/>
+              </a:spcAft>
+            </a:pPr>
+            <a:r>
+              <a:rPr kumimoji="0" lang="en-US" altLang="en-GB" sz="2000" b="0" i="0" u="none" strike="noStrike" cap="none" normalizeH="0" baseline="0" dirty="0">
+                <a:ln>
+                  <a:noFill/>
+                </a:ln>
+                <a:solidFill>
+                  <a:schemeClr val="tx1"/>
+                </a:solidFill>
+                <a:effectLst/>
+                <a:latin typeface="Arial" panose="020B0604020202020204" pitchFamily="34" charset="0"/>
+              </a:rPr>
+              <a:t>These activities encourage users to take short mental breaks and maintain emotional balance. </a:t>
+            </a:r>
+            <a:endParaRPr kumimoji="0" lang="en-US" altLang="en-GB" sz="2000" b="0" i="0" u="none" strike="noStrike" cap="none" normalizeH="0" baseline="0" dirty="0">
+              <a:ln>
+                <a:noFill/>
+              </a:ln>
+              <a:solidFill>
+                <a:schemeClr val="tx1"/>
+              </a:solidFill>
+              <a:effectLst/>
+              <a:latin typeface="Arial" panose="020B0604020202020204" pitchFamily="34" charset="0"/>
+            </a:endParaRPr>
+          </a:p>
+          <a:p>
+            <a:pPr eaLnBrk="0" fontAlgn="base" hangingPunct="0">
+              <a:lnSpc>
+                <a:spcPct val="100000"/>
+              </a:lnSpc>
+              <a:spcBef>
+                <a:spcPct val="0"/>
+              </a:spcBef>
+              <a:spcAft>
+                <a:spcPct val="0"/>
+              </a:spcAft>
+            </a:pPr>
+            <a:r>
+              <a:rPr kumimoji="0" lang="en-US" altLang="en-GB" sz="2000" b="0" i="0" u="none" strike="noStrike" cap="none" normalizeH="0" baseline="0" dirty="0">
+                <a:ln>
+                  <a:noFill/>
+                </a:ln>
+                <a:solidFill>
+                  <a:schemeClr val="tx1"/>
+                </a:solidFill>
+                <a:effectLst/>
+                <a:latin typeface="Arial" panose="020B0604020202020204" pitchFamily="34" charset="0"/>
+              </a:rPr>
+              <a:t>The results are displayed on the user dashboard, allowing users to view their mental health status, activity progress, and personalized feedback</a:t>
+            </a:r>
+            <a:endParaRPr kumimoji="0" lang="en-US" altLang="en-GB" sz="2000" b="0" i="0" u="none" strike="noStrike" cap="none" normalizeH="0" baseline="0" dirty="0">
+              <a:ln>
+                <a:noFill/>
+              </a:ln>
+              <a:solidFill>
+                <a:schemeClr val="tx1"/>
+              </a:solidFill>
+              <a:effectLst/>
+              <a:latin typeface="Arial" panose="020B0604020202020204" pitchFamily="34" charset="0"/>
+            </a:endParaRPr>
+          </a:p>
+          <a:p>
+            <a:pPr eaLnBrk="0" fontAlgn="base" hangingPunct="0">
+              <a:lnSpc>
+                <a:spcPct val="100000"/>
+              </a:lnSpc>
+              <a:spcBef>
+                <a:spcPct val="0"/>
+              </a:spcBef>
+              <a:spcAft>
+                <a:spcPct val="0"/>
+              </a:spcAft>
+            </a:pPr>
+            <a:r>
+              <a:rPr kumimoji="0" lang="en-US" altLang="en-GB" sz="2000" b="0" i="0" u="none" strike="noStrike" cap="none" normalizeH="0" baseline="0" dirty="0">
+                <a:ln>
+                  <a:noFill/>
+                </a:ln>
+                <a:solidFill>
+                  <a:schemeClr val="tx1"/>
+                </a:solidFill>
+                <a:effectLst/>
+                <a:latin typeface="Arial" panose="020B0604020202020204" pitchFamily="34" charset="0"/>
+              </a:rPr>
+              <a:t> The results are displayed on the dashboard, allowing users to view their mental health status and feedback.</a:t>
+            </a:r>
+            <a:endParaRPr kumimoji="0" lang="en-US" altLang="en-GB" sz="2000" b="0" i="0" u="none" strike="noStrike" cap="none" normalizeH="0" baseline="0" dirty="0">
+              <a:ln>
+                <a:noFill/>
+              </a:ln>
+              <a:solidFill>
+                <a:schemeClr val="tx1"/>
+              </a:solidFill>
+              <a:effectLst/>
+              <a:latin typeface="Arial" panose="020B0604020202020204" pitchFamily="34" charset="0"/>
+            </a:endParaRPr>
+          </a:p>
+        </p:txBody>
+      </p:sp>
     </p:spTree>
   </p:cSld>
   <p:clrMapOvr>
